--- a/GroundTruth/DynamicSmartArtTimeline_GroundTruthA.pptx
+++ b/GroundTruth/DynamicSmartArtTimeline_GroundTruthA.pptx
@@ -4,6 +4,9 @@
   <p:sldMasterIdLst>
     <p:sldMasterId id="2147483648" r:id="rId1"/>
   </p:sldMasterIdLst>
+  <p:notesMasterIdLst>
+    <p:notesMasterId r:id="rId4"/>
+  </p:notesMasterIdLst>
   <p:sldIdLst>
     <p:sldId id="256" r:id="rId2"/>
     <p:sldId id="262" r:id="rId3"/>
@@ -875,7 +878,7 @@
 <dgm:dataModel xmlns:dgm="http://schemas.openxmlformats.org/drawingml/2006/diagram" xmlns:a="http://schemas.openxmlformats.org/drawingml/2006/main">
   <dgm:ptLst>
     <dgm:pt modelId="{E518E308-8EE4-EC43-BDF7-58B55C14C8D7}" type="doc">
-      <dgm:prSet loTypeId="urn:microsoft.com/office/officeart/2005/8/layout/process1" loCatId="" qsTypeId="urn:microsoft.com/office/officeart/2005/8/quickstyle/simple1" qsCatId="simple" csTypeId="urn:microsoft.com/office/officeart/2005/8/colors/accent1_2" csCatId="accent1" phldr="1"/>
+      <dgm:prSet loTypeId="urn:microsoft.com/office/officeart/2005/8/layout/hProcess11" loCatId="" qsTypeId="urn:microsoft.com/office/officeart/2005/8/quickstyle/simple1" qsCatId="simple" csTypeId="urn:microsoft.com/office/officeart/2005/8/colors/accent1_2" csCatId="accent1" phldr="1"/>
       <dgm:spPr/>
     </dgm:pt>
     <dgm:pt modelId="{D64F0452-B798-3A4F-B4A8-EB34891ECC16}">
@@ -1099,7 +1102,7 @@
         </a:p>
       </dgm:t>
     </dgm:pt>
-    <dgm:pt modelId="{1A2482B0-48C8-EC40-9EED-45714F0D6143}" type="pres">
+    <dgm:pt modelId="{F0C60136-5D0C-7F45-A172-2D7CDE718E77}" type="pres">
       <dgm:prSet presAssocID="{E518E308-8EE4-EC43-BDF7-58B55C14C8D7}" presName="Name0" presStyleCnt="0">
         <dgm:presLayoutVars>
           <dgm:dir/>
@@ -1108,141 +1111,206 @@
       </dgm:prSet>
       <dgm:spPr/>
     </dgm:pt>
-    <dgm:pt modelId="{37AE6145-2F6F-0E43-B153-A0E48EEB6389}" type="pres">
-      <dgm:prSet presAssocID="{D64F0452-B798-3A4F-B4A8-EB34891ECC16}" presName="node" presStyleLbl="node1" presStyleIdx="0" presStyleCnt="6">
+    <dgm:pt modelId="{F34B53A2-417B-4C46-9E8B-6AA90C818AA2}" type="pres">
+      <dgm:prSet presAssocID="{E518E308-8EE4-EC43-BDF7-58B55C14C8D7}" presName="arrow" presStyleLbl="bgShp" presStyleIdx="0" presStyleCnt="1"/>
+      <dgm:spPr/>
+    </dgm:pt>
+    <dgm:pt modelId="{6311F74C-828F-074E-AAA1-9A24247F045E}" type="pres">
+      <dgm:prSet presAssocID="{E518E308-8EE4-EC43-BDF7-58B55C14C8D7}" presName="points" presStyleCnt="0"/>
+      <dgm:spPr/>
+    </dgm:pt>
+    <dgm:pt modelId="{66C36D0F-3979-B640-A51E-AA475C4F3176}" type="pres">
+      <dgm:prSet presAssocID="{D64F0452-B798-3A4F-B4A8-EB34891ECC16}" presName="compositeA" presStyleCnt="0"/>
+      <dgm:spPr/>
+    </dgm:pt>
+    <dgm:pt modelId="{3ACD5BCA-E1F0-064B-B1E7-505D5E61576A}" type="pres">
+      <dgm:prSet presAssocID="{D64F0452-B798-3A4F-B4A8-EB34891ECC16}" presName="textA" presStyleLbl="revTx" presStyleIdx="0" presStyleCnt="6">
         <dgm:presLayoutVars>
           <dgm:bulletEnabled val="1"/>
         </dgm:presLayoutVars>
       </dgm:prSet>
       <dgm:spPr/>
     </dgm:pt>
-    <dgm:pt modelId="{352DD2C2-515B-7746-A292-021DF27A6BF0}" type="pres">
-      <dgm:prSet presAssocID="{4C345DD7-E0A2-EF46-ACC6-95B9C2E007A3}" presName="sibTrans" presStyleLbl="sibTrans2D1" presStyleIdx="0" presStyleCnt="5"/>
+    <dgm:pt modelId="{14AE146A-A8BE-D041-8F6E-5617918E8EDD}" type="pres">
+      <dgm:prSet presAssocID="{D64F0452-B798-3A4F-B4A8-EB34891ECC16}" presName="circleA" presStyleLbl="node1" presStyleIdx="0" presStyleCnt="6"/>
       <dgm:spPr/>
     </dgm:pt>
-    <dgm:pt modelId="{AA8D4F39-A8B0-3E4F-ABFB-53FFAC41DECB}" type="pres">
-      <dgm:prSet presAssocID="{4C345DD7-E0A2-EF46-ACC6-95B9C2E007A3}" presName="connectorText" presStyleLbl="sibTrans2D1" presStyleIdx="0" presStyleCnt="5"/>
+    <dgm:pt modelId="{ACDD8CB9-8027-E247-8AE0-F4090F5B9846}" type="pres">
+      <dgm:prSet presAssocID="{D64F0452-B798-3A4F-B4A8-EB34891ECC16}" presName="spaceA" presStyleCnt="0"/>
       <dgm:spPr/>
     </dgm:pt>
-    <dgm:pt modelId="{8F1D6D04-E53D-7246-A0DB-435B673DACF5}" type="pres">
-      <dgm:prSet presAssocID="{05E9B516-7577-C04F-9D70-3EC1B541478B}" presName="node" presStyleLbl="node1" presStyleIdx="1" presStyleCnt="6">
+    <dgm:pt modelId="{7180162A-0B81-9F40-9ED8-ACD274730849}" type="pres">
+      <dgm:prSet presAssocID="{4C345DD7-E0A2-EF46-ACC6-95B9C2E007A3}" presName="space" presStyleCnt="0"/>
+      <dgm:spPr/>
+    </dgm:pt>
+    <dgm:pt modelId="{33480338-71AC-2F4D-98EF-53E1B9FE4912}" type="pres">
+      <dgm:prSet presAssocID="{05E9B516-7577-C04F-9D70-3EC1B541478B}" presName="compositeB" presStyleCnt="0"/>
+      <dgm:spPr/>
+    </dgm:pt>
+    <dgm:pt modelId="{193C38A5-4941-604B-B6DD-F9D8BF39AF28}" type="pres">
+      <dgm:prSet presAssocID="{05E9B516-7577-C04F-9D70-3EC1B541478B}" presName="textB" presStyleLbl="revTx" presStyleIdx="1" presStyleCnt="6">
         <dgm:presLayoutVars>
           <dgm:bulletEnabled val="1"/>
         </dgm:presLayoutVars>
       </dgm:prSet>
       <dgm:spPr/>
     </dgm:pt>
-    <dgm:pt modelId="{249A310B-40C6-2C4C-AC13-123029D581B7}" type="pres">
-      <dgm:prSet presAssocID="{99B86575-F606-2A42-A1B4-B367D6EA923C}" presName="sibTrans" presStyleLbl="sibTrans2D1" presStyleIdx="1" presStyleCnt="5"/>
+    <dgm:pt modelId="{8EB1DF06-BAEE-DE4F-964C-CD3EBEB726A4}" type="pres">
+      <dgm:prSet presAssocID="{05E9B516-7577-C04F-9D70-3EC1B541478B}" presName="circleB" presStyleLbl="node1" presStyleIdx="1" presStyleCnt="6"/>
       <dgm:spPr/>
     </dgm:pt>
-    <dgm:pt modelId="{C0C5804F-3182-C941-94D8-B6084B49126B}" type="pres">
-      <dgm:prSet presAssocID="{99B86575-F606-2A42-A1B4-B367D6EA923C}" presName="connectorText" presStyleLbl="sibTrans2D1" presStyleIdx="1" presStyleCnt="5"/>
+    <dgm:pt modelId="{F5E940C0-4BB1-CB46-AD03-2F469F508502}" type="pres">
+      <dgm:prSet presAssocID="{05E9B516-7577-C04F-9D70-3EC1B541478B}" presName="spaceB" presStyleCnt="0"/>
       <dgm:spPr/>
     </dgm:pt>
-    <dgm:pt modelId="{E90A6968-53A4-3242-A363-5E3F90793D3A}" type="pres">
-      <dgm:prSet presAssocID="{4FAE147E-FDC1-EE46-AA8D-6CEC4C06BAA5}" presName="node" presStyleLbl="node1" presStyleIdx="2" presStyleCnt="6">
+    <dgm:pt modelId="{323D86FF-7130-0147-9081-23195C1CC6FC}" type="pres">
+      <dgm:prSet presAssocID="{99B86575-F606-2A42-A1B4-B367D6EA923C}" presName="space" presStyleCnt="0"/>
+      <dgm:spPr/>
+    </dgm:pt>
+    <dgm:pt modelId="{AEA4FAFE-A15E-A74B-9231-ECA7774D362D}" type="pres">
+      <dgm:prSet presAssocID="{4FAE147E-FDC1-EE46-AA8D-6CEC4C06BAA5}" presName="compositeA" presStyleCnt="0"/>
+      <dgm:spPr/>
+    </dgm:pt>
+    <dgm:pt modelId="{E76CAE44-BA86-1141-BD26-10ACDF9AADB5}" type="pres">
+      <dgm:prSet presAssocID="{4FAE147E-FDC1-EE46-AA8D-6CEC4C06BAA5}" presName="textA" presStyleLbl="revTx" presStyleIdx="2" presStyleCnt="6">
         <dgm:presLayoutVars>
           <dgm:bulletEnabled val="1"/>
         </dgm:presLayoutVars>
       </dgm:prSet>
       <dgm:spPr/>
     </dgm:pt>
-    <dgm:pt modelId="{D651FFB4-1001-BF45-AF05-A6E8CBDDF723}" type="pres">
-      <dgm:prSet presAssocID="{E6F921C9-37FC-4B4C-A4E4-A2F2AC7DBD0F}" presName="sibTrans" presStyleLbl="sibTrans2D1" presStyleIdx="2" presStyleCnt="5"/>
+    <dgm:pt modelId="{9766099C-EB2D-EE48-97D1-EEF651CE03D3}" type="pres">
+      <dgm:prSet presAssocID="{4FAE147E-FDC1-EE46-AA8D-6CEC4C06BAA5}" presName="circleA" presStyleLbl="node1" presStyleIdx="2" presStyleCnt="6"/>
       <dgm:spPr/>
     </dgm:pt>
-    <dgm:pt modelId="{DED8785A-EC4F-0F4F-B430-6A7C0E5ABAC2}" type="pres">
-      <dgm:prSet presAssocID="{E6F921C9-37FC-4B4C-A4E4-A2F2AC7DBD0F}" presName="connectorText" presStyleLbl="sibTrans2D1" presStyleIdx="2" presStyleCnt="5"/>
+    <dgm:pt modelId="{8C3AD672-2159-764E-B62E-6DD1DFB85A84}" type="pres">
+      <dgm:prSet presAssocID="{4FAE147E-FDC1-EE46-AA8D-6CEC4C06BAA5}" presName="spaceA" presStyleCnt="0"/>
       <dgm:spPr/>
     </dgm:pt>
-    <dgm:pt modelId="{CCA8BD8E-DE61-8A4E-A302-493022F5A9E7}" type="pres">
-      <dgm:prSet presAssocID="{578710BC-8E08-C048-A47A-991989F0C01D}" presName="node" presStyleLbl="node1" presStyleIdx="3" presStyleCnt="6">
+    <dgm:pt modelId="{62846CE6-12BE-C644-AE32-2BD6661509AA}" type="pres">
+      <dgm:prSet presAssocID="{E6F921C9-37FC-4B4C-A4E4-A2F2AC7DBD0F}" presName="space" presStyleCnt="0"/>
+      <dgm:spPr/>
+    </dgm:pt>
+    <dgm:pt modelId="{A6F69227-D5A7-FE4D-B4E2-FB8F8A56D7B7}" type="pres">
+      <dgm:prSet presAssocID="{578710BC-8E08-C048-A47A-991989F0C01D}" presName="compositeB" presStyleCnt="0"/>
+      <dgm:spPr/>
+    </dgm:pt>
+    <dgm:pt modelId="{D50112E8-F870-B249-BF44-EED614BD8466}" type="pres">
+      <dgm:prSet presAssocID="{578710BC-8E08-C048-A47A-991989F0C01D}" presName="textB" presStyleLbl="revTx" presStyleIdx="3" presStyleCnt="6">
         <dgm:presLayoutVars>
           <dgm:bulletEnabled val="1"/>
         </dgm:presLayoutVars>
       </dgm:prSet>
       <dgm:spPr/>
     </dgm:pt>
-    <dgm:pt modelId="{84D2CEE7-8B94-374D-9671-6633B4C7BD5C}" type="pres">
-      <dgm:prSet presAssocID="{F9FCC498-A9A4-9646-92DE-89812AC4EE45}" presName="sibTrans" presStyleLbl="sibTrans2D1" presStyleIdx="3" presStyleCnt="5"/>
+    <dgm:pt modelId="{C6BBCB91-E373-4D40-9F07-9EAA3A8EFE68}" type="pres">
+      <dgm:prSet presAssocID="{578710BC-8E08-C048-A47A-991989F0C01D}" presName="circleB" presStyleLbl="node1" presStyleIdx="3" presStyleCnt="6"/>
       <dgm:spPr/>
     </dgm:pt>
-    <dgm:pt modelId="{41C393DE-A9E1-D14D-AA8E-A32E8C218F47}" type="pres">
-      <dgm:prSet presAssocID="{F9FCC498-A9A4-9646-92DE-89812AC4EE45}" presName="connectorText" presStyleLbl="sibTrans2D1" presStyleIdx="3" presStyleCnt="5"/>
+    <dgm:pt modelId="{FAF7A6D8-7359-D94F-B3D3-11FB496B24AD}" type="pres">
+      <dgm:prSet presAssocID="{578710BC-8E08-C048-A47A-991989F0C01D}" presName="spaceB" presStyleCnt="0"/>
       <dgm:spPr/>
     </dgm:pt>
-    <dgm:pt modelId="{99C487CF-BC3E-724E-A4D7-4F45DE206D20}" type="pres">
-      <dgm:prSet presAssocID="{33AD10D3-FEA4-4648-A6F7-BD8380726E4E}" presName="node" presStyleLbl="node1" presStyleIdx="4" presStyleCnt="6">
+    <dgm:pt modelId="{27B1914E-AD2F-E048-8E26-E8F60E51FED2}" type="pres">
+      <dgm:prSet presAssocID="{F9FCC498-A9A4-9646-92DE-89812AC4EE45}" presName="space" presStyleCnt="0"/>
+      <dgm:spPr/>
+    </dgm:pt>
+    <dgm:pt modelId="{BF15BA36-32E2-634A-B611-6C5067B85830}" type="pres">
+      <dgm:prSet presAssocID="{33AD10D3-FEA4-4648-A6F7-BD8380726E4E}" presName="compositeA" presStyleCnt="0"/>
+      <dgm:spPr/>
+    </dgm:pt>
+    <dgm:pt modelId="{43B65D6A-BBD8-6146-864A-095202549051}" type="pres">
+      <dgm:prSet presAssocID="{33AD10D3-FEA4-4648-A6F7-BD8380726E4E}" presName="textA" presStyleLbl="revTx" presStyleIdx="4" presStyleCnt="6">
         <dgm:presLayoutVars>
           <dgm:bulletEnabled val="1"/>
         </dgm:presLayoutVars>
       </dgm:prSet>
       <dgm:spPr/>
     </dgm:pt>
-    <dgm:pt modelId="{73342E72-052B-BE48-8EEF-AAA93E58A1AC}" type="pres">
-      <dgm:prSet presAssocID="{426800F9-6F88-CB47-B4E7-58801FB2AE54}" presName="sibTrans" presStyleLbl="sibTrans2D1" presStyleIdx="4" presStyleCnt="5"/>
+    <dgm:pt modelId="{F3522304-F9C9-0147-9A33-F9FA579777FE}" type="pres">
+      <dgm:prSet presAssocID="{33AD10D3-FEA4-4648-A6F7-BD8380726E4E}" presName="circleA" presStyleLbl="node1" presStyleIdx="4" presStyleCnt="6"/>
       <dgm:spPr/>
     </dgm:pt>
-    <dgm:pt modelId="{4A1ED1A6-CCAA-E649-91D0-72663226A234}" type="pres">
-      <dgm:prSet presAssocID="{426800F9-6F88-CB47-B4E7-58801FB2AE54}" presName="connectorText" presStyleLbl="sibTrans2D1" presStyleIdx="4" presStyleCnt="5"/>
+    <dgm:pt modelId="{CCF30CE3-E6AF-C547-BA65-CFC453ABE02B}" type="pres">
+      <dgm:prSet presAssocID="{33AD10D3-FEA4-4648-A6F7-BD8380726E4E}" presName="spaceA" presStyleCnt="0"/>
       <dgm:spPr/>
     </dgm:pt>
-    <dgm:pt modelId="{AA0C9CB3-D071-984D-B670-FE8F51E65083}" type="pres">
-      <dgm:prSet presAssocID="{B6E5AA44-D033-C344-A399-1BC0C2AE174D}" presName="node" presStyleLbl="node1" presStyleIdx="5" presStyleCnt="6">
+    <dgm:pt modelId="{DE522F53-9359-614B-B432-6B62EBFFF52E}" type="pres">
+      <dgm:prSet presAssocID="{426800F9-6F88-CB47-B4E7-58801FB2AE54}" presName="space" presStyleCnt="0"/>
+      <dgm:spPr/>
+    </dgm:pt>
+    <dgm:pt modelId="{B7760301-A0C9-C740-A8A4-ED2800433B6B}" type="pres">
+      <dgm:prSet presAssocID="{B6E5AA44-D033-C344-A399-1BC0C2AE174D}" presName="compositeB" presStyleCnt="0"/>
+      <dgm:spPr/>
+    </dgm:pt>
+    <dgm:pt modelId="{B9CF2E2B-1F7F-094D-9B3F-BFDC7234BBD0}" type="pres">
+      <dgm:prSet presAssocID="{B6E5AA44-D033-C344-A399-1BC0C2AE174D}" presName="textB" presStyleLbl="revTx" presStyleIdx="5" presStyleCnt="6">
         <dgm:presLayoutVars>
           <dgm:bulletEnabled val="1"/>
         </dgm:presLayoutVars>
       </dgm:prSet>
       <dgm:spPr/>
     </dgm:pt>
+    <dgm:pt modelId="{D674BEE5-E22E-8448-B548-A7F269C0ABAF}" type="pres">
+      <dgm:prSet presAssocID="{B6E5AA44-D033-C344-A399-1BC0C2AE174D}" presName="circleB" presStyleLbl="node1" presStyleIdx="5" presStyleCnt="6"/>
+      <dgm:spPr/>
+    </dgm:pt>
+    <dgm:pt modelId="{2FF8AC5F-49B4-9F47-A929-03E1A61E6A4F}" type="pres">
+      <dgm:prSet presAssocID="{B6E5AA44-D033-C344-A399-1BC0C2AE174D}" presName="spaceB" presStyleCnt="0"/>
+      <dgm:spPr/>
+    </dgm:pt>
   </dgm:ptLst>
   <dgm:cxnLst>
     <dgm:cxn modelId="{F1575A0C-C59F-CC42-AFE8-CE9096BA6259}" srcId="{E518E308-8EE4-EC43-BDF7-58B55C14C8D7}" destId="{578710BC-8E08-C048-A47A-991989F0C01D}" srcOrd="3" destOrd="0" parTransId="{EC8BA9CB-E0D7-E84B-B9AD-90F91FE7F65F}" sibTransId="{F9FCC498-A9A4-9646-92DE-89812AC4EE45}"/>
-    <dgm:cxn modelId="{2A8A6719-20C5-D64F-ADBD-92DB79E026F1}" type="presOf" srcId="{4C345DD7-E0A2-EF46-ACC6-95B9C2E007A3}" destId="{352DD2C2-515B-7746-A292-021DF27A6BF0}" srcOrd="0" destOrd="0" presId="urn:microsoft.com/office/officeart/2005/8/layout/process1"/>
     <dgm:cxn modelId="{8DAFD31B-D237-6C48-B635-817C9EF9CF3C}" srcId="{E518E308-8EE4-EC43-BDF7-58B55C14C8D7}" destId="{33AD10D3-FEA4-4648-A6F7-BD8380726E4E}" srcOrd="4" destOrd="0" parTransId="{FCF48F36-1E4B-6F41-B526-F8344354A9D8}" sibTransId="{426800F9-6F88-CB47-B4E7-58801FB2AE54}"/>
-    <dgm:cxn modelId="{855C331F-B03F-CB47-AE53-0EB026A3FE15}" type="presOf" srcId="{578710BC-8E08-C048-A47A-991989F0C01D}" destId="{CCA8BD8E-DE61-8A4E-A302-493022F5A9E7}" srcOrd="0" destOrd="0" presId="urn:microsoft.com/office/officeart/2005/8/layout/process1"/>
-    <dgm:cxn modelId="{85AFB11F-33F3-7249-9322-87854E91AA75}" type="presOf" srcId="{4C345DD7-E0A2-EF46-ACC6-95B9C2E007A3}" destId="{AA8D4F39-A8B0-3E4F-ABFB-53FFAC41DECB}" srcOrd="1" destOrd="0" presId="urn:microsoft.com/office/officeart/2005/8/layout/process1"/>
-    <dgm:cxn modelId="{659B6629-50DF-4F4B-9BCC-C351090800AA}" type="presOf" srcId="{E6F921C9-37FC-4B4C-A4E4-A2F2AC7DBD0F}" destId="{DED8785A-EC4F-0F4F-B430-6A7C0E5ABAC2}" srcOrd="1" destOrd="0" presId="urn:microsoft.com/office/officeart/2005/8/layout/process1"/>
-    <dgm:cxn modelId="{7782BD2E-AEA1-D441-981D-1B6AC54EE2D0}" type="presOf" srcId="{F9FCC498-A9A4-9646-92DE-89812AC4EE45}" destId="{41C393DE-A9E1-D14D-AA8E-A32E8C218F47}" srcOrd="1" destOrd="0" presId="urn:microsoft.com/office/officeart/2005/8/layout/process1"/>
+    <dgm:cxn modelId="{DDA83B1E-74AF-F048-A2B8-3975476D5F7D}" type="presOf" srcId="{578710BC-8E08-C048-A47A-991989F0C01D}" destId="{D50112E8-F870-B249-BF44-EED614BD8466}" srcOrd="0" destOrd="0" presId="urn:microsoft.com/office/officeart/2005/8/layout/hProcess11"/>
+    <dgm:cxn modelId="{B4DB6F30-A38D-C540-8C2D-8EB338E3104C}" type="presOf" srcId="{33AD10D3-FEA4-4648-A6F7-BD8380726E4E}" destId="{43B65D6A-BBD8-6146-864A-095202549051}" srcOrd="0" destOrd="0" presId="urn:microsoft.com/office/officeart/2005/8/layout/hProcess11"/>
     <dgm:cxn modelId="{C1481139-D6B2-324B-A0AA-D1E8B4E6DA34}" srcId="{E518E308-8EE4-EC43-BDF7-58B55C14C8D7}" destId="{D64F0452-B798-3A4F-B4A8-EB34891ECC16}" srcOrd="0" destOrd="0" parTransId="{882AE446-F3DD-704E-B524-E7CCC8FD309D}" sibTransId="{4C345DD7-E0A2-EF46-ACC6-95B9C2E007A3}"/>
-    <dgm:cxn modelId="{35B6AD3D-31B6-3141-80CD-F5E1F44B193A}" type="presOf" srcId="{E6F921C9-37FC-4B4C-A4E4-A2F2AC7DBD0F}" destId="{D651FFB4-1001-BF45-AF05-A6E8CBDDF723}" srcOrd="0" destOrd="0" presId="urn:microsoft.com/office/officeart/2005/8/layout/process1"/>
-    <dgm:cxn modelId="{A546CA43-A8B6-1D44-B628-DA250DC65176}" type="presOf" srcId="{E518E308-8EE4-EC43-BDF7-58B55C14C8D7}" destId="{1A2482B0-48C8-EC40-9EED-45714F0D6143}" srcOrd="0" destOrd="0" presId="urn:microsoft.com/office/officeart/2005/8/layout/process1"/>
     <dgm:cxn modelId="{BB9A3E4C-4DFF-5B4D-948C-2DD30660DA0E}" srcId="{E518E308-8EE4-EC43-BDF7-58B55C14C8D7}" destId="{4FAE147E-FDC1-EE46-AA8D-6CEC4C06BAA5}" srcOrd="2" destOrd="0" parTransId="{5C529214-EDE9-2548-A29E-801AB23745E3}" sibTransId="{E6F921C9-37FC-4B4C-A4E4-A2F2AC7DBD0F}"/>
-    <dgm:cxn modelId="{9D14D15E-9A15-8A48-8B35-B52733FAA5E8}" type="presOf" srcId="{F9FCC498-A9A4-9646-92DE-89812AC4EE45}" destId="{84D2CEE7-8B94-374D-9671-6633B4C7BD5C}" srcOrd="0" destOrd="0" presId="urn:microsoft.com/office/officeart/2005/8/layout/process1"/>
-    <dgm:cxn modelId="{1B0F3A7B-4C1D-714D-9B8A-0269CE88FF7E}" type="presOf" srcId="{99B86575-F606-2A42-A1B4-B367D6EA923C}" destId="{C0C5804F-3182-C941-94D8-B6084B49126B}" srcOrd="1" destOrd="0" presId="urn:microsoft.com/office/officeart/2005/8/layout/process1"/>
-    <dgm:cxn modelId="{01AB967C-BB34-A643-B843-D5AAD2FFCD26}" type="presOf" srcId="{99B86575-F606-2A42-A1B4-B367D6EA923C}" destId="{249A310B-40C6-2C4C-AC13-123029D581B7}" srcOrd="0" destOrd="0" presId="urn:microsoft.com/office/officeart/2005/8/layout/process1"/>
-    <dgm:cxn modelId="{34D09BB3-508C-1E41-BD22-9E5E03BA90C7}" type="presOf" srcId="{B6E5AA44-D033-C344-A399-1BC0C2AE174D}" destId="{AA0C9CB3-D071-984D-B670-FE8F51E65083}" srcOrd="0" destOrd="0" presId="urn:microsoft.com/office/officeart/2005/8/layout/process1"/>
-    <dgm:cxn modelId="{78D3BCB7-0C99-A745-B750-5248732C013D}" type="presOf" srcId="{D64F0452-B798-3A4F-B4A8-EB34891ECC16}" destId="{37AE6145-2F6F-0E43-B153-A0E48EEB6389}" srcOrd="0" destOrd="0" presId="urn:microsoft.com/office/officeart/2005/8/layout/process1"/>
-    <dgm:cxn modelId="{3366D0B7-97AA-104E-9174-EF4540E6293D}" type="presOf" srcId="{426800F9-6F88-CB47-B4E7-58801FB2AE54}" destId="{4A1ED1A6-CCAA-E649-91D0-72663226A234}" srcOrd="1" destOrd="0" presId="urn:microsoft.com/office/officeart/2005/8/layout/process1"/>
+    <dgm:cxn modelId="{505D6E4C-074F-D64F-A746-137F02CDBEC9}" type="presOf" srcId="{4FAE147E-FDC1-EE46-AA8D-6CEC4C06BAA5}" destId="{E76CAE44-BA86-1141-BD26-10ACDF9AADB5}" srcOrd="0" destOrd="0" presId="urn:microsoft.com/office/officeart/2005/8/layout/hProcess11"/>
+    <dgm:cxn modelId="{27ACF657-EE00-3347-B091-FD5C8E2FAFA2}" type="presOf" srcId="{05E9B516-7577-C04F-9D70-3EC1B541478B}" destId="{193C38A5-4941-604B-B6DD-F9D8BF39AF28}" srcOrd="0" destOrd="0" presId="urn:microsoft.com/office/officeart/2005/8/layout/hProcess11"/>
+    <dgm:cxn modelId="{6C2F08B5-5C6C-0445-9E75-C183BBEAC9EC}" type="presOf" srcId="{B6E5AA44-D033-C344-A399-1BC0C2AE174D}" destId="{B9CF2E2B-1F7F-094D-9B3F-BFDC7234BBD0}" srcOrd="0" destOrd="0" presId="urn:microsoft.com/office/officeart/2005/8/layout/hProcess11"/>
     <dgm:cxn modelId="{085667BF-A8A8-F94D-92BB-30D8D340FC39}" srcId="{E518E308-8EE4-EC43-BDF7-58B55C14C8D7}" destId="{B6E5AA44-D033-C344-A399-1BC0C2AE174D}" srcOrd="5" destOrd="0" parTransId="{9A76D26D-1EFB-B146-81C9-6D9DCA13B8AE}" sibTransId="{3E9AC939-A511-9243-918D-2B477EE2DC09}"/>
-    <dgm:cxn modelId="{9CD4C2C8-84BB-1041-86B9-395CC0794685}" type="presOf" srcId="{4FAE147E-FDC1-EE46-AA8D-6CEC4C06BAA5}" destId="{E90A6968-53A4-3242-A363-5E3F90793D3A}" srcOrd="0" destOrd="0" presId="urn:microsoft.com/office/officeart/2005/8/layout/process1"/>
-    <dgm:cxn modelId="{5804A6DC-32A3-8641-A582-69579583CD80}" type="presOf" srcId="{05E9B516-7577-C04F-9D70-3EC1B541478B}" destId="{8F1D6D04-E53D-7246-A0DB-435B673DACF5}" srcOrd="0" destOrd="0" presId="urn:microsoft.com/office/officeart/2005/8/layout/process1"/>
+    <dgm:cxn modelId="{F2C2DDE0-521F-0541-BA4F-597A17ECE235}" type="presOf" srcId="{D64F0452-B798-3A4F-B4A8-EB34891ECC16}" destId="{3ACD5BCA-E1F0-064B-B1E7-505D5E61576A}" srcOrd="0" destOrd="0" presId="urn:microsoft.com/office/officeart/2005/8/layout/hProcess11"/>
     <dgm:cxn modelId="{6C5960E2-1E19-C349-9425-E9E5DBCFA4B4}" srcId="{E518E308-8EE4-EC43-BDF7-58B55C14C8D7}" destId="{05E9B516-7577-C04F-9D70-3EC1B541478B}" srcOrd="1" destOrd="0" parTransId="{A1BA5C5C-606A-CB41-B0DF-788E54F23B78}" sibTransId="{99B86575-F606-2A42-A1B4-B367D6EA923C}"/>
-    <dgm:cxn modelId="{8B640CEE-8129-984A-B38E-73934E10CA23}" type="presOf" srcId="{426800F9-6F88-CB47-B4E7-58801FB2AE54}" destId="{73342E72-052B-BE48-8EEF-AAA93E58A1AC}" srcOrd="0" destOrd="0" presId="urn:microsoft.com/office/officeart/2005/8/layout/process1"/>
-    <dgm:cxn modelId="{B9A6BBFA-C5BE-C74C-816E-7B7F59FD08E6}" type="presOf" srcId="{33AD10D3-FEA4-4648-A6F7-BD8380726E4E}" destId="{99C487CF-BC3E-724E-A4D7-4F45DE206D20}" srcOrd="0" destOrd="0" presId="urn:microsoft.com/office/officeart/2005/8/layout/process1"/>
-    <dgm:cxn modelId="{7C733C9A-7781-194E-B399-AECEB18AA24A}" type="presParOf" srcId="{1A2482B0-48C8-EC40-9EED-45714F0D6143}" destId="{37AE6145-2F6F-0E43-B153-A0E48EEB6389}" srcOrd="0" destOrd="0" presId="urn:microsoft.com/office/officeart/2005/8/layout/process1"/>
-    <dgm:cxn modelId="{5D815548-46D0-F946-B3C2-491A99E7EC7C}" type="presParOf" srcId="{1A2482B0-48C8-EC40-9EED-45714F0D6143}" destId="{352DD2C2-515B-7746-A292-021DF27A6BF0}" srcOrd="1" destOrd="0" presId="urn:microsoft.com/office/officeart/2005/8/layout/process1"/>
-    <dgm:cxn modelId="{E6CF75ED-704D-3548-8CF5-D72CC7F23612}" type="presParOf" srcId="{352DD2C2-515B-7746-A292-021DF27A6BF0}" destId="{AA8D4F39-A8B0-3E4F-ABFB-53FFAC41DECB}" srcOrd="0" destOrd="0" presId="urn:microsoft.com/office/officeart/2005/8/layout/process1"/>
-    <dgm:cxn modelId="{F5893E74-F7D6-DC4D-A715-AA4C349D8FBE}" type="presParOf" srcId="{1A2482B0-48C8-EC40-9EED-45714F0D6143}" destId="{8F1D6D04-E53D-7246-A0DB-435B673DACF5}" srcOrd="2" destOrd="0" presId="urn:microsoft.com/office/officeart/2005/8/layout/process1"/>
-    <dgm:cxn modelId="{1ED85ADE-75CD-6144-82D8-D86726590C2E}" type="presParOf" srcId="{1A2482B0-48C8-EC40-9EED-45714F0D6143}" destId="{249A310B-40C6-2C4C-AC13-123029D581B7}" srcOrd="3" destOrd="0" presId="urn:microsoft.com/office/officeart/2005/8/layout/process1"/>
-    <dgm:cxn modelId="{A7033850-9A5B-4742-8332-E53362677829}" type="presParOf" srcId="{249A310B-40C6-2C4C-AC13-123029D581B7}" destId="{C0C5804F-3182-C941-94D8-B6084B49126B}" srcOrd="0" destOrd="0" presId="urn:microsoft.com/office/officeart/2005/8/layout/process1"/>
-    <dgm:cxn modelId="{7ACA1061-A4CF-7247-A5EA-F9BBF99A64DD}" type="presParOf" srcId="{1A2482B0-48C8-EC40-9EED-45714F0D6143}" destId="{E90A6968-53A4-3242-A363-5E3F90793D3A}" srcOrd="4" destOrd="0" presId="urn:microsoft.com/office/officeart/2005/8/layout/process1"/>
-    <dgm:cxn modelId="{AA7CF2E4-58D7-0C4B-B2CA-405399E89275}" type="presParOf" srcId="{1A2482B0-48C8-EC40-9EED-45714F0D6143}" destId="{D651FFB4-1001-BF45-AF05-A6E8CBDDF723}" srcOrd="5" destOrd="0" presId="urn:microsoft.com/office/officeart/2005/8/layout/process1"/>
-    <dgm:cxn modelId="{EAF21E39-438E-DA46-AAC3-44279B44301B}" type="presParOf" srcId="{D651FFB4-1001-BF45-AF05-A6E8CBDDF723}" destId="{DED8785A-EC4F-0F4F-B430-6A7C0E5ABAC2}" srcOrd="0" destOrd="0" presId="urn:microsoft.com/office/officeart/2005/8/layout/process1"/>
-    <dgm:cxn modelId="{BE9070E4-2522-EA46-8B4E-6EA41A839ACC}" type="presParOf" srcId="{1A2482B0-48C8-EC40-9EED-45714F0D6143}" destId="{CCA8BD8E-DE61-8A4E-A302-493022F5A9E7}" srcOrd="6" destOrd="0" presId="urn:microsoft.com/office/officeart/2005/8/layout/process1"/>
-    <dgm:cxn modelId="{7E9E5174-571E-A242-BDBE-0360E0B33CA0}" type="presParOf" srcId="{1A2482B0-48C8-EC40-9EED-45714F0D6143}" destId="{84D2CEE7-8B94-374D-9671-6633B4C7BD5C}" srcOrd="7" destOrd="0" presId="urn:microsoft.com/office/officeart/2005/8/layout/process1"/>
-    <dgm:cxn modelId="{A65082E5-983B-0E4B-A949-643E7DAAC55F}" type="presParOf" srcId="{84D2CEE7-8B94-374D-9671-6633B4C7BD5C}" destId="{41C393DE-A9E1-D14D-AA8E-A32E8C218F47}" srcOrd="0" destOrd="0" presId="urn:microsoft.com/office/officeart/2005/8/layout/process1"/>
-    <dgm:cxn modelId="{5CBFC25C-F2D2-FE4F-975E-C9F4A031B704}" type="presParOf" srcId="{1A2482B0-48C8-EC40-9EED-45714F0D6143}" destId="{99C487CF-BC3E-724E-A4D7-4F45DE206D20}" srcOrd="8" destOrd="0" presId="urn:microsoft.com/office/officeart/2005/8/layout/process1"/>
-    <dgm:cxn modelId="{28112BD6-54B7-1B49-9F05-A6340CC17D0C}" type="presParOf" srcId="{1A2482B0-48C8-EC40-9EED-45714F0D6143}" destId="{73342E72-052B-BE48-8EEF-AAA93E58A1AC}" srcOrd="9" destOrd="0" presId="urn:microsoft.com/office/officeart/2005/8/layout/process1"/>
-    <dgm:cxn modelId="{A781537A-0B9A-FC47-887E-F40F1A72F66D}" type="presParOf" srcId="{73342E72-052B-BE48-8EEF-AAA93E58A1AC}" destId="{4A1ED1A6-CCAA-E649-91D0-72663226A234}" srcOrd="0" destOrd="0" presId="urn:microsoft.com/office/officeart/2005/8/layout/process1"/>
-    <dgm:cxn modelId="{760F313C-0538-C24A-98DB-5DE791F61EBF}" type="presParOf" srcId="{1A2482B0-48C8-EC40-9EED-45714F0D6143}" destId="{AA0C9CB3-D071-984D-B670-FE8F51E65083}" srcOrd="10" destOrd="0" presId="urn:microsoft.com/office/officeart/2005/8/layout/process1"/>
+    <dgm:cxn modelId="{84E108F4-7E09-8449-A722-B9E741CB3D98}" type="presOf" srcId="{E518E308-8EE4-EC43-BDF7-58B55C14C8D7}" destId="{F0C60136-5D0C-7F45-A172-2D7CDE718E77}" srcOrd="0" destOrd="0" presId="urn:microsoft.com/office/officeart/2005/8/layout/hProcess11"/>
+    <dgm:cxn modelId="{8A864596-95E4-B44F-8C14-F93CD8069609}" type="presParOf" srcId="{F0C60136-5D0C-7F45-A172-2D7CDE718E77}" destId="{F34B53A2-417B-4C46-9E8B-6AA90C818AA2}" srcOrd="0" destOrd="0" presId="urn:microsoft.com/office/officeart/2005/8/layout/hProcess11"/>
+    <dgm:cxn modelId="{0B298698-BD5B-C244-A4D5-08F8DFDEA9E8}" type="presParOf" srcId="{F0C60136-5D0C-7F45-A172-2D7CDE718E77}" destId="{6311F74C-828F-074E-AAA1-9A24247F045E}" srcOrd="1" destOrd="0" presId="urn:microsoft.com/office/officeart/2005/8/layout/hProcess11"/>
+    <dgm:cxn modelId="{BF5FAFBA-6362-1E47-9110-21969D53480C}" type="presParOf" srcId="{6311F74C-828F-074E-AAA1-9A24247F045E}" destId="{66C36D0F-3979-B640-A51E-AA475C4F3176}" srcOrd="0" destOrd="0" presId="urn:microsoft.com/office/officeart/2005/8/layout/hProcess11"/>
+    <dgm:cxn modelId="{CB8B2716-C06C-A04A-B94F-59E11B0DF090}" type="presParOf" srcId="{66C36D0F-3979-B640-A51E-AA475C4F3176}" destId="{3ACD5BCA-E1F0-064B-B1E7-505D5E61576A}" srcOrd="0" destOrd="0" presId="urn:microsoft.com/office/officeart/2005/8/layout/hProcess11"/>
+    <dgm:cxn modelId="{F66EBE20-90E6-0349-BA1A-D282849247C1}" type="presParOf" srcId="{66C36D0F-3979-B640-A51E-AA475C4F3176}" destId="{14AE146A-A8BE-D041-8F6E-5617918E8EDD}" srcOrd="1" destOrd="0" presId="urn:microsoft.com/office/officeart/2005/8/layout/hProcess11"/>
+    <dgm:cxn modelId="{31EDBA86-CD00-0F49-BFC4-B282897EE719}" type="presParOf" srcId="{66C36D0F-3979-B640-A51E-AA475C4F3176}" destId="{ACDD8CB9-8027-E247-8AE0-F4090F5B9846}" srcOrd="2" destOrd="0" presId="urn:microsoft.com/office/officeart/2005/8/layout/hProcess11"/>
+    <dgm:cxn modelId="{393AF386-9735-8741-AC89-C9E8EB4D08AF}" type="presParOf" srcId="{6311F74C-828F-074E-AAA1-9A24247F045E}" destId="{7180162A-0B81-9F40-9ED8-ACD274730849}" srcOrd="1" destOrd="0" presId="urn:microsoft.com/office/officeart/2005/8/layout/hProcess11"/>
+    <dgm:cxn modelId="{1B3EB10E-F36D-3845-8AEB-6DEEBD9A5587}" type="presParOf" srcId="{6311F74C-828F-074E-AAA1-9A24247F045E}" destId="{33480338-71AC-2F4D-98EF-53E1B9FE4912}" srcOrd="2" destOrd="0" presId="urn:microsoft.com/office/officeart/2005/8/layout/hProcess11"/>
+    <dgm:cxn modelId="{95015A19-1976-F743-B631-0AD6635F8088}" type="presParOf" srcId="{33480338-71AC-2F4D-98EF-53E1B9FE4912}" destId="{193C38A5-4941-604B-B6DD-F9D8BF39AF28}" srcOrd="0" destOrd="0" presId="urn:microsoft.com/office/officeart/2005/8/layout/hProcess11"/>
+    <dgm:cxn modelId="{E8CB844C-4FF9-AE43-BC40-ED15687E5A65}" type="presParOf" srcId="{33480338-71AC-2F4D-98EF-53E1B9FE4912}" destId="{8EB1DF06-BAEE-DE4F-964C-CD3EBEB726A4}" srcOrd="1" destOrd="0" presId="urn:microsoft.com/office/officeart/2005/8/layout/hProcess11"/>
+    <dgm:cxn modelId="{05E1FBFE-99DA-A146-98EA-537B3C6EF817}" type="presParOf" srcId="{33480338-71AC-2F4D-98EF-53E1B9FE4912}" destId="{F5E940C0-4BB1-CB46-AD03-2F469F508502}" srcOrd="2" destOrd="0" presId="urn:microsoft.com/office/officeart/2005/8/layout/hProcess11"/>
+    <dgm:cxn modelId="{88D597A1-B6C8-CB44-8449-3915024BA699}" type="presParOf" srcId="{6311F74C-828F-074E-AAA1-9A24247F045E}" destId="{323D86FF-7130-0147-9081-23195C1CC6FC}" srcOrd="3" destOrd="0" presId="urn:microsoft.com/office/officeart/2005/8/layout/hProcess11"/>
+    <dgm:cxn modelId="{0F46DB34-B9AF-4447-85C8-87C686ED3061}" type="presParOf" srcId="{6311F74C-828F-074E-AAA1-9A24247F045E}" destId="{AEA4FAFE-A15E-A74B-9231-ECA7774D362D}" srcOrd="4" destOrd="0" presId="urn:microsoft.com/office/officeart/2005/8/layout/hProcess11"/>
+    <dgm:cxn modelId="{07F1B1A5-1303-C348-BE25-966155AE9B57}" type="presParOf" srcId="{AEA4FAFE-A15E-A74B-9231-ECA7774D362D}" destId="{E76CAE44-BA86-1141-BD26-10ACDF9AADB5}" srcOrd="0" destOrd="0" presId="urn:microsoft.com/office/officeart/2005/8/layout/hProcess11"/>
+    <dgm:cxn modelId="{47F178A9-7498-8E4A-A6C9-8B5C2DF23904}" type="presParOf" srcId="{AEA4FAFE-A15E-A74B-9231-ECA7774D362D}" destId="{9766099C-EB2D-EE48-97D1-EEF651CE03D3}" srcOrd="1" destOrd="0" presId="urn:microsoft.com/office/officeart/2005/8/layout/hProcess11"/>
+    <dgm:cxn modelId="{79646B6B-198D-5F40-8E0C-91E567E5A4CE}" type="presParOf" srcId="{AEA4FAFE-A15E-A74B-9231-ECA7774D362D}" destId="{8C3AD672-2159-764E-B62E-6DD1DFB85A84}" srcOrd="2" destOrd="0" presId="urn:microsoft.com/office/officeart/2005/8/layout/hProcess11"/>
+    <dgm:cxn modelId="{B67DC802-935D-6242-A148-328DC5996489}" type="presParOf" srcId="{6311F74C-828F-074E-AAA1-9A24247F045E}" destId="{62846CE6-12BE-C644-AE32-2BD6661509AA}" srcOrd="5" destOrd="0" presId="urn:microsoft.com/office/officeart/2005/8/layout/hProcess11"/>
+    <dgm:cxn modelId="{C6A0DB8D-800E-EC4B-B92F-9AD2635A6216}" type="presParOf" srcId="{6311F74C-828F-074E-AAA1-9A24247F045E}" destId="{A6F69227-D5A7-FE4D-B4E2-FB8F8A56D7B7}" srcOrd="6" destOrd="0" presId="urn:microsoft.com/office/officeart/2005/8/layout/hProcess11"/>
+    <dgm:cxn modelId="{437F9F3D-57FC-6C45-B4E1-31351456694F}" type="presParOf" srcId="{A6F69227-D5A7-FE4D-B4E2-FB8F8A56D7B7}" destId="{D50112E8-F870-B249-BF44-EED614BD8466}" srcOrd="0" destOrd="0" presId="urn:microsoft.com/office/officeart/2005/8/layout/hProcess11"/>
+    <dgm:cxn modelId="{9448F9B6-BC31-DD4C-90CF-53F75314FF09}" type="presParOf" srcId="{A6F69227-D5A7-FE4D-B4E2-FB8F8A56D7B7}" destId="{C6BBCB91-E373-4D40-9F07-9EAA3A8EFE68}" srcOrd="1" destOrd="0" presId="urn:microsoft.com/office/officeart/2005/8/layout/hProcess11"/>
+    <dgm:cxn modelId="{478296C3-FD73-9D42-BBB9-94A9129A73F1}" type="presParOf" srcId="{A6F69227-D5A7-FE4D-B4E2-FB8F8A56D7B7}" destId="{FAF7A6D8-7359-D94F-B3D3-11FB496B24AD}" srcOrd="2" destOrd="0" presId="urn:microsoft.com/office/officeart/2005/8/layout/hProcess11"/>
+    <dgm:cxn modelId="{9FA8B44D-31C9-9341-8E9F-756F1F8A0CF8}" type="presParOf" srcId="{6311F74C-828F-074E-AAA1-9A24247F045E}" destId="{27B1914E-AD2F-E048-8E26-E8F60E51FED2}" srcOrd="7" destOrd="0" presId="urn:microsoft.com/office/officeart/2005/8/layout/hProcess11"/>
+    <dgm:cxn modelId="{53C107C8-D7DC-FE4F-9DE6-93B056F9F1C1}" type="presParOf" srcId="{6311F74C-828F-074E-AAA1-9A24247F045E}" destId="{BF15BA36-32E2-634A-B611-6C5067B85830}" srcOrd="8" destOrd="0" presId="urn:microsoft.com/office/officeart/2005/8/layout/hProcess11"/>
+    <dgm:cxn modelId="{26090C04-E70B-8246-9532-24206C03B130}" type="presParOf" srcId="{BF15BA36-32E2-634A-B611-6C5067B85830}" destId="{43B65D6A-BBD8-6146-864A-095202549051}" srcOrd="0" destOrd="0" presId="urn:microsoft.com/office/officeart/2005/8/layout/hProcess11"/>
+    <dgm:cxn modelId="{45277CCF-C7B9-734F-95B7-99155E7C82B2}" type="presParOf" srcId="{BF15BA36-32E2-634A-B611-6C5067B85830}" destId="{F3522304-F9C9-0147-9A33-F9FA579777FE}" srcOrd="1" destOrd="0" presId="urn:microsoft.com/office/officeart/2005/8/layout/hProcess11"/>
+    <dgm:cxn modelId="{95A764E2-EFEA-A44A-BE2B-A3B31A8E2306}" type="presParOf" srcId="{BF15BA36-32E2-634A-B611-6C5067B85830}" destId="{CCF30CE3-E6AF-C547-BA65-CFC453ABE02B}" srcOrd="2" destOrd="0" presId="urn:microsoft.com/office/officeart/2005/8/layout/hProcess11"/>
+    <dgm:cxn modelId="{564D87DD-E874-4046-B1BE-B514B8B40BFA}" type="presParOf" srcId="{6311F74C-828F-074E-AAA1-9A24247F045E}" destId="{DE522F53-9359-614B-B432-6B62EBFFF52E}" srcOrd="9" destOrd="0" presId="urn:microsoft.com/office/officeart/2005/8/layout/hProcess11"/>
+    <dgm:cxn modelId="{04DCF5C4-17C1-9B42-B501-30D8CD827CBE}" type="presParOf" srcId="{6311F74C-828F-074E-AAA1-9A24247F045E}" destId="{B7760301-A0C9-C740-A8A4-ED2800433B6B}" srcOrd="10" destOrd="0" presId="urn:microsoft.com/office/officeart/2005/8/layout/hProcess11"/>
+    <dgm:cxn modelId="{1E3C7353-FFFB-DB40-9A1A-0E8E7194DC84}" type="presParOf" srcId="{B7760301-A0C9-C740-A8A4-ED2800433B6B}" destId="{B9CF2E2B-1F7F-094D-9B3F-BFDC7234BBD0}" srcOrd="0" destOrd="0" presId="urn:microsoft.com/office/officeart/2005/8/layout/hProcess11"/>
+    <dgm:cxn modelId="{23694644-9791-AB4A-8A8F-40ED561B3972}" type="presParOf" srcId="{B7760301-A0C9-C740-A8A4-ED2800433B6B}" destId="{D674BEE5-E22E-8448-B548-A7F269C0ABAF}" srcOrd="1" destOrd="0" presId="urn:microsoft.com/office/officeart/2005/8/layout/hProcess11"/>
+    <dgm:cxn modelId="{F8A03FC7-FEA7-AD4B-B2CC-737AA6FAFB44}" type="presParOf" srcId="{B7760301-A0C9-C740-A8A4-ED2800433B6B}" destId="{2FF8AC5F-49B4-9F47-A929-03E1A61E6A4F}" srcOrd="2" destOrd="0" presId="urn:microsoft.com/office/officeart/2005/8/layout/hProcess11"/>
   </dgm:cxnLst>
   <dgm:bg/>
   <dgm:whole/>
   <dgm:extLst>
     <a:ext uri="http://schemas.microsoft.com/office/drawing/2008/diagram">
-      <dsp:dataModelExt xmlns:dsp="http://schemas.microsoft.com/office/drawing/2008/diagram" relId="rId10" minVer="http://schemas.openxmlformats.org/drawingml/2006/diagram"/>
+      <dsp:dataModelExt xmlns:dsp="http://schemas.microsoft.com/office/drawing/2008/diagram" relId="rId7" minVer="http://schemas.openxmlformats.org/drawingml/2006/diagram"/>
     </a:ext>
   </dgm:extLst>
 </dgm:dataModel>
@@ -1256,20 +1324,118 @@
       <dsp:cNvGrpSpPr/>
     </dsp:nvGrpSpPr>
     <dsp:grpSpPr/>
-    <dsp:sp modelId="{37AE6145-2F6F-0E43-B153-A0E48EEB6389}">
+    <dsp:sp modelId="{F34B53A2-417B-4C46-9E8B-6AA90C818AA2}">
       <dsp:nvSpPr>
         <dsp:cNvPr id="0" name=""/>
         <dsp:cNvSpPr/>
       </dsp:nvSpPr>
       <dsp:spPr>
         <a:xfrm>
-          <a:off x="0" y="465736"/>
-          <a:ext cx="1420177" cy="1171646"/>
+          <a:off x="0" y="630936"/>
+          <a:ext cx="11361420" cy="841248"/>
         </a:xfrm>
-        <a:prstGeom prst="roundRect">
-          <a:avLst>
-            <a:gd name="adj" fmla="val 10000"/>
-          </a:avLst>
+        <a:prstGeom prst="notchedRightArrow">
+          <a:avLst/>
+        </a:prstGeom>
+        <a:solidFill>
+          <a:schemeClr val="accent1">
+            <a:tint val="40000"/>
+            <a:hueOff val="0"/>
+            <a:satOff val="0"/>
+            <a:lumOff val="0"/>
+            <a:alphaOff val="0"/>
+          </a:schemeClr>
+        </a:solidFill>
+        <a:ln>
+          <a:noFill/>
+        </a:ln>
+        <a:effectLst/>
+      </dsp:spPr>
+      <dsp:style>
+        <a:lnRef idx="0">
+          <a:scrgbClr r="0" g="0" b="0"/>
+        </a:lnRef>
+        <a:fillRef idx="1">
+          <a:scrgbClr r="0" g="0" b="0"/>
+        </a:fillRef>
+        <a:effectRef idx="0">
+          <a:scrgbClr r="0" g="0" b="0"/>
+        </a:effectRef>
+        <a:fontRef idx="minor"/>
+      </dsp:style>
+    </dsp:sp>
+    <dsp:sp modelId="{3ACD5BCA-E1F0-064B-B1E7-505D5E61576A}">
+      <dsp:nvSpPr>
+        <dsp:cNvPr id="0" name=""/>
+        <dsp:cNvSpPr/>
+      </dsp:nvSpPr>
+      <dsp:spPr>
+        <a:xfrm>
+          <a:off x="2808" y="0"/>
+          <a:ext cx="1635145" cy="841248"/>
+        </a:xfrm>
+        <a:prstGeom prst="rect">
+          <a:avLst/>
+        </a:prstGeom>
+        <a:noFill/>
+        <a:ln>
+          <a:noFill/>
+        </a:ln>
+        <a:effectLst/>
+      </dsp:spPr>
+      <dsp:style>
+        <a:lnRef idx="0">
+          <a:scrgbClr r="0" g="0" b="0"/>
+        </a:lnRef>
+        <a:fillRef idx="0">
+          <a:scrgbClr r="0" g="0" b="0"/>
+        </a:fillRef>
+        <a:effectRef idx="0">
+          <a:scrgbClr r="0" g="0" b="0"/>
+        </a:effectRef>
+        <a:fontRef idx="minor"/>
+      </dsp:style>
+      <dsp:txBody>
+        <a:bodyPr spcFirstLastPara="0" vert="horz" wrap="square" lIns="106680" tIns="106680" rIns="106680" bIns="106680" numCol="1" spcCol="1270" anchor="b" anchorCtr="0">
+          <a:noAutofit/>
+        </a:bodyPr>
+        <a:lstStyle/>
+        <a:p>
+          <a:pPr marL="0" lvl="0" indent="0" algn="ctr" defTabSz="666750">
+            <a:lnSpc>
+              <a:spcPct val="90000"/>
+            </a:lnSpc>
+            <a:spcBef>
+              <a:spcPct val="0"/>
+            </a:spcBef>
+            <a:spcAft>
+              <a:spcPct val="35000"/>
+            </a:spcAft>
+            <a:buNone/>
+          </a:pPr>
+          <a:r>
+            <a:rPr lang="en-US" sz="1500" kern="1200" dirty="0"/>
+            <a:t>Project Charter Approved (Jan 05)</a:t>
+          </a:r>
+        </a:p>
+      </dsp:txBody>
+      <dsp:txXfrm>
+        <a:off x="2808" y="0"/>
+        <a:ext cx="1635145" cy="841248"/>
+      </dsp:txXfrm>
+    </dsp:sp>
+    <dsp:sp modelId="{14AE146A-A8BE-D041-8F6E-5617918E8EDD}">
+      <dsp:nvSpPr>
+        <dsp:cNvPr id="0" name=""/>
+        <dsp:cNvSpPr/>
+      </dsp:nvSpPr>
+      <dsp:spPr>
+        <a:xfrm>
+          <a:off x="715225" y="946404"/>
+          <a:ext cx="210312" cy="210312"/>
+        </a:xfrm>
+        <a:prstGeom prst="ellipse">
+          <a:avLst/>
         </a:prstGeom>
         <a:solidFill>
           <a:schemeClr val="accent1">
@@ -1306,13 +1472,45 @@
           <a:schemeClr val="lt1"/>
         </a:fontRef>
       </dsp:style>
+    </dsp:sp>
+    <dsp:sp modelId="{193C38A5-4941-604B-B6DD-F9D8BF39AF28}">
+      <dsp:nvSpPr>
+        <dsp:cNvPr id="0" name=""/>
+        <dsp:cNvSpPr/>
+      </dsp:nvSpPr>
+      <dsp:spPr>
+        <a:xfrm>
+          <a:off x="1719711" y="1261872"/>
+          <a:ext cx="1635145" cy="841248"/>
+        </a:xfrm>
+        <a:prstGeom prst="rect">
+          <a:avLst/>
+        </a:prstGeom>
+        <a:noFill/>
+        <a:ln>
+          <a:noFill/>
+        </a:ln>
+        <a:effectLst/>
+      </dsp:spPr>
+      <dsp:style>
+        <a:lnRef idx="0">
+          <a:scrgbClr r="0" g="0" b="0"/>
+        </a:lnRef>
+        <a:fillRef idx="0">
+          <a:scrgbClr r="0" g="0" b="0"/>
+        </a:fillRef>
+        <a:effectRef idx="0">
+          <a:scrgbClr r="0" g="0" b="0"/>
+        </a:effectRef>
+        <a:fontRef idx="minor"/>
+      </dsp:style>
       <dsp:txBody>
-        <a:bodyPr spcFirstLastPara="0" vert="horz" wrap="square" lIns="64770" tIns="64770" rIns="64770" bIns="64770" numCol="1" spcCol="1270" anchor="ctr" anchorCtr="0">
+        <a:bodyPr spcFirstLastPara="0" vert="horz" wrap="square" lIns="106680" tIns="106680" rIns="106680" bIns="106680" numCol="1" spcCol="1270" anchor="t" anchorCtr="0">
           <a:noAutofit/>
         </a:bodyPr>
         <a:lstStyle/>
         <a:p>
-          <a:pPr marL="0" lvl="0" indent="0" algn="ctr" defTabSz="755650">
+          <a:pPr marL="0" lvl="0" indent="0" algn="ctr" defTabSz="666750">
             <a:lnSpc>
               <a:spcPct val="90000"/>
             </a:lnSpc>
@@ -1325,100 +1523,28 @@
             <a:buNone/>
           </a:pPr>
           <a:r>
-            <a:rPr lang="en-US" sz="1700" kern="1200" dirty="0"/>
-            <a:t>Project Charter Approved (Jan 05)</a:t>
+            <a:rPr lang="en-US" sz="1500" kern="1200" dirty="0"/>
+            <a:t>Team Kickoff (Jan 12)</a:t>
           </a:r>
         </a:p>
       </dsp:txBody>
       <dsp:txXfrm>
-        <a:off x="34316" y="500052"/>
-        <a:ext cx="1351545" cy="1103014"/>
+        <a:off x="1719711" y="1261872"/>
+        <a:ext cx="1635145" cy="841248"/>
       </dsp:txXfrm>
     </dsp:sp>
-    <dsp:sp modelId="{352DD2C2-515B-7746-A292-021DF27A6BF0}">
+    <dsp:sp modelId="{8EB1DF06-BAEE-DE4F-964C-CD3EBEB726A4}">
       <dsp:nvSpPr>
         <dsp:cNvPr id="0" name=""/>
         <dsp:cNvSpPr/>
       </dsp:nvSpPr>
       <dsp:spPr>
         <a:xfrm>
-          <a:off x="1562195" y="875457"/>
-          <a:ext cx="301077" cy="352204"/>
+          <a:off x="2432128" y="946404"/>
+          <a:ext cx="210312" cy="210312"/>
         </a:xfrm>
-        <a:prstGeom prst="rightArrow">
-          <a:avLst>
-            <a:gd name="adj1" fmla="val 60000"/>
-            <a:gd name="adj2" fmla="val 50000"/>
-          </a:avLst>
-        </a:prstGeom>
-        <a:solidFill>
-          <a:schemeClr val="accent1">
-            <a:tint val="60000"/>
-            <a:hueOff val="0"/>
-            <a:satOff val="0"/>
-            <a:lumOff val="0"/>
-            <a:alphaOff val="0"/>
-          </a:schemeClr>
-        </a:solidFill>
-        <a:ln>
-          <a:noFill/>
-        </a:ln>
-        <a:effectLst/>
-      </dsp:spPr>
-      <dsp:style>
-        <a:lnRef idx="0">
-          <a:scrgbClr r="0" g="0" b="0"/>
-        </a:lnRef>
-        <a:fillRef idx="1">
-          <a:scrgbClr r="0" g="0" b="0"/>
-        </a:fillRef>
-        <a:effectRef idx="0">
-          <a:scrgbClr r="0" g="0" b="0"/>
-        </a:effectRef>
-        <a:fontRef idx="minor">
-          <a:schemeClr val="lt1"/>
-        </a:fontRef>
-      </dsp:style>
-      <dsp:txBody>
-        <a:bodyPr spcFirstLastPara="0" vert="horz" wrap="square" lIns="0" tIns="0" rIns="0" bIns="0" numCol="1" spcCol="1270" anchor="ctr" anchorCtr="0">
-          <a:noAutofit/>
-        </a:bodyPr>
-        <a:lstStyle/>
-        <a:p>
-          <a:pPr marL="0" lvl="0" indent="0" algn="ctr" defTabSz="622300">
-            <a:lnSpc>
-              <a:spcPct val="90000"/>
-            </a:lnSpc>
-            <a:spcBef>
-              <a:spcPct val="0"/>
-            </a:spcBef>
-            <a:spcAft>
-              <a:spcPct val="35000"/>
-            </a:spcAft>
-            <a:buNone/>
-          </a:pPr>
-          <a:endParaRPr lang="en-US" sz="1400" kern="1200"/>
-        </a:p>
-      </dsp:txBody>
-      <dsp:txXfrm>
-        <a:off x="1562195" y="945898"/>
-        <a:ext cx="210754" cy="211322"/>
-      </dsp:txXfrm>
-    </dsp:sp>
-    <dsp:sp modelId="{8F1D6D04-E53D-7246-A0DB-435B673DACF5}">
-      <dsp:nvSpPr>
-        <dsp:cNvPr id="0" name=""/>
-        <dsp:cNvSpPr/>
-      </dsp:nvSpPr>
-      <dsp:spPr>
-        <a:xfrm>
-          <a:off x="1988248" y="465736"/>
-          <a:ext cx="1420177" cy="1171646"/>
-        </a:xfrm>
-        <a:prstGeom prst="roundRect">
-          <a:avLst>
-            <a:gd name="adj" fmla="val 10000"/>
-          </a:avLst>
+        <a:prstGeom prst="ellipse">
+          <a:avLst/>
         </a:prstGeom>
         <a:solidFill>
           <a:schemeClr val="accent1">
@@ -1455,13 +1581,45 @@
           <a:schemeClr val="lt1"/>
         </a:fontRef>
       </dsp:style>
+    </dsp:sp>
+    <dsp:sp modelId="{E76CAE44-BA86-1141-BD26-10ACDF9AADB5}">
+      <dsp:nvSpPr>
+        <dsp:cNvPr id="0" name=""/>
+        <dsp:cNvSpPr/>
+      </dsp:nvSpPr>
+      <dsp:spPr>
+        <a:xfrm>
+          <a:off x="3436614" y="0"/>
+          <a:ext cx="1635145" cy="841248"/>
+        </a:xfrm>
+        <a:prstGeom prst="rect">
+          <a:avLst/>
+        </a:prstGeom>
+        <a:noFill/>
+        <a:ln>
+          <a:noFill/>
+        </a:ln>
+        <a:effectLst/>
+      </dsp:spPr>
+      <dsp:style>
+        <a:lnRef idx="0">
+          <a:scrgbClr r="0" g="0" b="0"/>
+        </a:lnRef>
+        <a:fillRef idx="0">
+          <a:scrgbClr r="0" g="0" b="0"/>
+        </a:fillRef>
+        <a:effectRef idx="0">
+          <a:scrgbClr r="0" g="0" b="0"/>
+        </a:effectRef>
+        <a:fontRef idx="minor"/>
+      </dsp:style>
       <dsp:txBody>
-        <a:bodyPr spcFirstLastPara="0" vert="horz" wrap="square" lIns="64770" tIns="64770" rIns="64770" bIns="64770" numCol="1" spcCol="1270" anchor="ctr" anchorCtr="0">
+        <a:bodyPr spcFirstLastPara="0" vert="horz" wrap="square" lIns="106680" tIns="106680" rIns="106680" bIns="106680" numCol="1" spcCol="1270" anchor="b" anchorCtr="0">
           <a:noAutofit/>
         </a:bodyPr>
         <a:lstStyle/>
         <a:p>
-          <a:pPr marL="0" lvl="0" indent="0" algn="ctr" defTabSz="755650">
+          <a:pPr marL="0" lvl="0" indent="0" algn="ctr" defTabSz="666750">
             <a:lnSpc>
               <a:spcPct val="90000"/>
             </a:lnSpc>
@@ -1474,100 +1632,28 @@
             <a:buNone/>
           </a:pPr>
           <a:r>
-            <a:rPr lang="en-US" sz="1700" kern="1200" dirty="0"/>
-            <a:t>Team Kickoff (Jan 12)</a:t>
+            <a:rPr lang="en-US" sz="1500" kern="1200" dirty="0"/>
+            <a:t>Prototype Complete (Feb 20)</a:t>
           </a:r>
         </a:p>
       </dsp:txBody>
       <dsp:txXfrm>
-        <a:off x="2022564" y="500052"/>
-        <a:ext cx="1351545" cy="1103014"/>
+        <a:off x="3436614" y="0"/>
+        <a:ext cx="1635145" cy="841248"/>
       </dsp:txXfrm>
     </dsp:sp>
-    <dsp:sp modelId="{249A310B-40C6-2C4C-AC13-123029D581B7}">
+    <dsp:sp modelId="{9766099C-EB2D-EE48-97D1-EEF651CE03D3}">
       <dsp:nvSpPr>
         <dsp:cNvPr id="0" name=""/>
         <dsp:cNvSpPr/>
       </dsp:nvSpPr>
       <dsp:spPr>
         <a:xfrm>
-          <a:off x="3550443" y="875457"/>
-          <a:ext cx="301077" cy="352204"/>
+          <a:off x="4149031" y="946404"/>
+          <a:ext cx="210312" cy="210312"/>
         </a:xfrm>
-        <a:prstGeom prst="rightArrow">
-          <a:avLst>
-            <a:gd name="adj1" fmla="val 60000"/>
-            <a:gd name="adj2" fmla="val 50000"/>
-          </a:avLst>
-        </a:prstGeom>
-        <a:solidFill>
-          <a:schemeClr val="accent1">
-            <a:tint val="60000"/>
-            <a:hueOff val="0"/>
-            <a:satOff val="0"/>
-            <a:lumOff val="0"/>
-            <a:alphaOff val="0"/>
-          </a:schemeClr>
-        </a:solidFill>
-        <a:ln>
-          <a:noFill/>
-        </a:ln>
-        <a:effectLst/>
-      </dsp:spPr>
-      <dsp:style>
-        <a:lnRef idx="0">
-          <a:scrgbClr r="0" g="0" b="0"/>
-        </a:lnRef>
-        <a:fillRef idx="1">
-          <a:scrgbClr r="0" g="0" b="0"/>
-        </a:fillRef>
-        <a:effectRef idx="0">
-          <a:scrgbClr r="0" g="0" b="0"/>
-        </a:effectRef>
-        <a:fontRef idx="minor">
-          <a:schemeClr val="lt1"/>
-        </a:fontRef>
-      </dsp:style>
-      <dsp:txBody>
-        <a:bodyPr spcFirstLastPara="0" vert="horz" wrap="square" lIns="0" tIns="0" rIns="0" bIns="0" numCol="1" spcCol="1270" anchor="ctr" anchorCtr="0">
-          <a:noAutofit/>
-        </a:bodyPr>
-        <a:lstStyle/>
-        <a:p>
-          <a:pPr marL="0" lvl="0" indent="0" algn="ctr" defTabSz="622300">
-            <a:lnSpc>
-              <a:spcPct val="90000"/>
-            </a:lnSpc>
-            <a:spcBef>
-              <a:spcPct val="0"/>
-            </a:spcBef>
-            <a:spcAft>
-              <a:spcPct val="35000"/>
-            </a:spcAft>
-            <a:buNone/>
-          </a:pPr>
-          <a:endParaRPr lang="en-US" sz="1400" kern="1200"/>
-        </a:p>
-      </dsp:txBody>
-      <dsp:txXfrm>
-        <a:off x="3550443" y="945898"/>
-        <a:ext cx="210754" cy="211322"/>
-      </dsp:txXfrm>
-    </dsp:sp>
-    <dsp:sp modelId="{E90A6968-53A4-3242-A363-5E3F90793D3A}">
-      <dsp:nvSpPr>
-        <dsp:cNvPr id="0" name=""/>
-        <dsp:cNvSpPr/>
-      </dsp:nvSpPr>
-      <dsp:spPr>
-        <a:xfrm>
-          <a:off x="3976497" y="465736"/>
-          <a:ext cx="1420177" cy="1171646"/>
-        </a:xfrm>
-        <a:prstGeom prst="roundRect">
-          <a:avLst>
-            <a:gd name="adj" fmla="val 10000"/>
-          </a:avLst>
+        <a:prstGeom prst="ellipse">
+          <a:avLst/>
         </a:prstGeom>
         <a:solidFill>
           <a:schemeClr val="accent1">
@@ -1604,13 +1690,45 @@
           <a:schemeClr val="lt1"/>
         </a:fontRef>
       </dsp:style>
+    </dsp:sp>
+    <dsp:sp modelId="{D50112E8-F870-B249-BF44-EED614BD8466}">
+      <dsp:nvSpPr>
+        <dsp:cNvPr id="0" name=""/>
+        <dsp:cNvSpPr/>
+      </dsp:nvSpPr>
+      <dsp:spPr>
+        <a:xfrm>
+          <a:off x="5153517" y="1261872"/>
+          <a:ext cx="1635145" cy="841248"/>
+        </a:xfrm>
+        <a:prstGeom prst="rect">
+          <a:avLst/>
+        </a:prstGeom>
+        <a:noFill/>
+        <a:ln>
+          <a:noFill/>
+        </a:ln>
+        <a:effectLst/>
+      </dsp:spPr>
+      <dsp:style>
+        <a:lnRef idx="0">
+          <a:scrgbClr r="0" g="0" b="0"/>
+        </a:lnRef>
+        <a:fillRef idx="0">
+          <a:scrgbClr r="0" g="0" b="0"/>
+        </a:fillRef>
+        <a:effectRef idx="0">
+          <a:scrgbClr r="0" g="0" b="0"/>
+        </a:effectRef>
+        <a:fontRef idx="minor"/>
+      </dsp:style>
       <dsp:txBody>
-        <a:bodyPr spcFirstLastPara="0" vert="horz" wrap="square" lIns="64770" tIns="64770" rIns="64770" bIns="64770" numCol="1" spcCol="1270" anchor="ctr" anchorCtr="0">
+        <a:bodyPr spcFirstLastPara="0" vert="horz" wrap="square" lIns="106680" tIns="106680" rIns="106680" bIns="106680" numCol="1" spcCol="1270" anchor="t" anchorCtr="0">
           <a:noAutofit/>
         </a:bodyPr>
         <a:lstStyle/>
         <a:p>
-          <a:pPr marL="0" lvl="0" indent="0" algn="ctr" defTabSz="755650">
+          <a:pPr marL="0" lvl="0" indent="0" algn="ctr" defTabSz="666750" rtl="0">
             <a:lnSpc>
               <a:spcPct val="90000"/>
             </a:lnSpc>
@@ -1623,100 +1741,29 @@
             <a:buNone/>
           </a:pPr>
           <a:r>
-            <a:rPr lang="en-US" sz="1700" kern="1200" dirty="0"/>
-            <a:t>Prototype Complete (Feb 20)</a:t>
+            <a:rPr lang="en-US" sz="1500" kern="1200"/>
+            <a:t>Beta Launch (Mar 10)</a:t>
           </a:r>
+          <a:endParaRPr lang="en-US" sz="1500" kern="1200" dirty="0"/>
         </a:p>
       </dsp:txBody>
       <dsp:txXfrm>
-        <a:off x="4010813" y="500052"/>
-        <a:ext cx="1351545" cy="1103014"/>
+        <a:off x="5153517" y="1261872"/>
+        <a:ext cx="1635145" cy="841248"/>
       </dsp:txXfrm>
     </dsp:sp>
-    <dsp:sp modelId="{D651FFB4-1001-BF45-AF05-A6E8CBDDF723}">
+    <dsp:sp modelId="{C6BBCB91-E373-4D40-9F07-9EAA3A8EFE68}">
       <dsp:nvSpPr>
         <dsp:cNvPr id="0" name=""/>
         <dsp:cNvSpPr/>
       </dsp:nvSpPr>
       <dsp:spPr>
         <a:xfrm>
-          <a:off x="5538692" y="875457"/>
-          <a:ext cx="301077" cy="352204"/>
+          <a:off x="5865934" y="946404"/>
+          <a:ext cx="210312" cy="210312"/>
         </a:xfrm>
-        <a:prstGeom prst="rightArrow">
-          <a:avLst>
-            <a:gd name="adj1" fmla="val 60000"/>
-            <a:gd name="adj2" fmla="val 50000"/>
-          </a:avLst>
-        </a:prstGeom>
-        <a:solidFill>
-          <a:schemeClr val="accent1">
-            <a:tint val="60000"/>
-            <a:hueOff val="0"/>
-            <a:satOff val="0"/>
-            <a:lumOff val="0"/>
-            <a:alphaOff val="0"/>
-          </a:schemeClr>
-        </a:solidFill>
-        <a:ln>
-          <a:noFill/>
-        </a:ln>
-        <a:effectLst/>
-      </dsp:spPr>
-      <dsp:style>
-        <a:lnRef idx="0">
-          <a:scrgbClr r="0" g="0" b="0"/>
-        </a:lnRef>
-        <a:fillRef idx="1">
-          <a:scrgbClr r="0" g="0" b="0"/>
-        </a:fillRef>
-        <a:effectRef idx="0">
-          <a:scrgbClr r="0" g="0" b="0"/>
-        </a:effectRef>
-        <a:fontRef idx="minor">
-          <a:schemeClr val="lt1"/>
-        </a:fontRef>
-      </dsp:style>
-      <dsp:txBody>
-        <a:bodyPr spcFirstLastPara="0" vert="horz" wrap="square" lIns="0" tIns="0" rIns="0" bIns="0" numCol="1" spcCol="1270" anchor="ctr" anchorCtr="0">
-          <a:noAutofit/>
-        </a:bodyPr>
-        <a:lstStyle/>
-        <a:p>
-          <a:pPr marL="0" lvl="0" indent="0" algn="ctr" defTabSz="622300">
-            <a:lnSpc>
-              <a:spcPct val="90000"/>
-            </a:lnSpc>
-            <a:spcBef>
-              <a:spcPct val="0"/>
-            </a:spcBef>
-            <a:spcAft>
-              <a:spcPct val="35000"/>
-            </a:spcAft>
-            <a:buNone/>
-          </a:pPr>
-          <a:endParaRPr lang="en-US" sz="1400" kern="1200"/>
-        </a:p>
-      </dsp:txBody>
-      <dsp:txXfrm>
-        <a:off x="5538692" y="945898"/>
-        <a:ext cx="210754" cy="211322"/>
-      </dsp:txXfrm>
-    </dsp:sp>
-    <dsp:sp modelId="{CCA8BD8E-DE61-8A4E-A302-493022F5A9E7}">
-      <dsp:nvSpPr>
-        <dsp:cNvPr id="0" name=""/>
-        <dsp:cNvSpPr/>
-      </dsp:nvSpPr>
-      <dsp:spPr>
-        <a:xfrm>
-          <a:off x="5964745" y="465736"/>
-          <a:ext cx="1420177" cy="1171646"/>
-        </a:xfrm>
-        <a:prstGeom prst="roundRect">
-          <a:avLst>
-            <a:gd name="adj" fmla="val 10000"/>
-          </a:avLst>
+        <a:prstGeom prst="ellipse">
+          <a:avLst/>
         </a:prstGeom>
         <a:solidFill>
           <a:schemeClr val="accent1">
@@ -1753,13 +1800,45 @@
           <a:schemeClr val="lt1"/>
         </a:fontRef>
       </dsp:style>
+    </dsp:sp>
+    <dsp:sp modelId="{43B65D6A-BBD8-6146-864A-095202549051}">
+      <dsp:nvSpPr>
+        <dsp:cNvPr id="0" name=""/>
+        <dsp:cNvSpPr/>
+      </dsp:nvSpPr>
+      <dsp:spPr>
+        <a:xfrm>
+          <a:off x="6870420" y="0"/>
+          <a:ext cx="1635145" cy="841248"/>
+        </a:xfrm>
+        <a:prstGeom prst="rect">
+          <a:avLst/>
+        </a:prstGeom>
+        <a:noFill/>
+        <a:ln>
+          <a:noFill/>
+        </a:ln>
+        <a:effectLst/>
+      </dsp:spPr>
+      <dsp:style>
+        <a:lnRef idx="0">
+          <a:scrgbClr r="0" g="0" b="0"/>
+        </a:lnRef>
+        <a:fillRef idx="0">
+          <a:scrgbClr r="0" g="0" b="0"/>
+        </a:fillRef>
+        <a:effectRef idx="0">
+          <a:scrgbClr r="0" g="0" b="0"/>
+        </a:effectRef>
+        <a:fontRef idx="minor"/>
+      </dsp:style>
       <dsp:txBody>
-        <a:bodyPr spcFirstLastPara="0" vert="horz" wrap="square" lIns="64770" tIns="64770" rIns="64770" bIns="64770" numCol="1" spcCol="1270" anchor="ctr" anchorCtr="0">
+        <a:bodyPr spcFirstLastPara="0" vert="horz" wrap="square" lIns="106680" tIns="106680" rIns="106680" bIns="106680" numCol="1" spcCol="1270" anchor="b" anchorCtr="0">
           <a:noAutofit/>
         </a:bodyPr>
         <a:lstStyle/>
         <a:p>
-          <a:pPr marL="0" lvl="0" indent="0" algn="ctr" defTabSz="755650" rtl="0">
+          <a:pPr marL="0" lvl="0" indent="0" algn="ctr" defTabSz="666750" rtl="0">
             <a:lnSpc>
               <a:spcPct val="90000"/>
             </a:lnSpc>
@@ -1772,101 +1851,29 @@
             <a:buNone/>
           </a:pPr>
           <a:r>
-            <a:rPr lang="en-US" sz="1700" kern="1200"/>
-            <a:t>Beta Launch (Mar 10)</a:t>
+            <a:rPr lang="en-US" sz="1500" kern="1200"/>
+            <a:t>Public Launch (Apr 30)</a:t>
           </a:r>
-          <a:endParaRPr lang="en-US" sz="1700" kern="1200" dirty="0"/>
+          <a:endParaRPr lang="en-US" sz="1500" kern="1200" dirty="0"/>
         </a:p>
       </dsp:txBody>
       <dsp:txXfrm>
-        <a:off x="5999061" y="500052"/>
-        <a:ext cx="1351545" cy="1103014"/>
+        <a:off x="6870420" y="0"/>
+        <a:ext cx="1635145" cy="841248"/>
       </dsp:txXfrm>
     </dsp:sp>
-    <dsp:sp modelId="{84D2CEE7-8B94-374D-9671-6633B4C7BD5C}">
+    <dsp:sp modelId="{F3522304-F9C9-0147-9A33-F9FA579777FE}">
       <dsp:nvSpPr>
         <dsp:cNvPr id="0" name=""/>
         <dsp:cNvSpPr/>
       </dsp:nvSpPr>
       <dsp:spPr>
         <a:xfrm>
-          <a:off x="7526940" y="875457"/>
-          <a:ext cx="301077" cy="352204"/>
+          <a:off x="7582837" y="946404"/>
+          <a:ext cx="210312" cy="210312"/>
         </a:xfrm>
-        <a:prstGeom prst="rightArrow">
-          <a:avLst>
-            <a:gd name="adj1" fmla="val 60000"/>
-            <a:gd name="adj2" fmla="val 50000"/>
-          </a:avLst>
-        </a:prstGeom>
-        <a:solidFill>
-          <a:schemeClr val="accent1">
-            <a:tint val="60000"/>
-            <a:hueOff val="0"/>
-            <a:satOff val="0"/>
-            <a:lumOff val="0"/>
-            <a:alphaOff val="0"/>
-          </a:schemeClr>
-        </a:solidFill>
-        <a:ln>
-          <a:noFill/>
-        </a:ln>
-        <a:effectLst/>
-      </dsp:spPr>
-      <dsp:style>
-        <a:lnRef idx="0">
-          <a:scrgbClr r="0" g="0" b="0"/>
-        </a:lnRef>
-        <a:fillRef idx="1">
-          <a:scrgbClr r="0" g="0" b="0"/>
-        </a:fillRef>
-        <a:effectRef idx="0">
-          <a:scrgbClr r="0" g="0" b="0"/>
-        </a:effectRef>
-        <a:fontRef idx="minor">
-          <a:schemeClr val="lt1"/>
-        </a:fontRef>
-      </dsp:style>
-      <dsp:txBody>
-        <a:bodyPr spcFirstLastPara="0" vert="horz" wrap="square" lIns="0" tIns="0" rIns="0" bIns="0" numCol="1" spcCol="1270" anchor="ctr" anchorCtr="0">
-          <a:noAutofit/>
-        </a:bodyPr>
-        <a:lstStyle/>
-        <a:p>
-          <a:pPr marL="0" lvl="0" indent="0" algn="ctr" defTabSz="622300">
-            <a:lnSpc>
-              <a:spcPct val="90000"/>
-            </a:lnSpc>
-            <a:spcBef>
-              <a:spcPct val="0"/>
-            </a:spcBef>
-            <a:spcAft>
-              <a:spcPct val="35000"/>
-            </a:spcAft>
-            <a:buNone/>
-          </a:pPr>
-          <a:endParaRPr lang="en-US" sz="1400" kern="1200"/>
-        </a:p>
-      </dsp:txBody>
-      <dsp:txXfrm>
-        <a:off x="7526940" y="945898"/>
-        <a:ext cx="210754" cy="211322"/>
-      </dsp:txXfrm>
-    </dsp:sp>
-    <dsp:sp modelId="{99C487CF-BC3E-724E-A4D7-4F45DE206D20}">
-      <dsp:nvSpPr>
-        <dsp:cNvPr id="0" name=""/>
-        <dsp:cNvSpPr/>
-      </dsp:nvSpPr>
-      <dsp:spPr>
-        <a:xfrm>
-          <a:off x="7952994" y="465736"/>
-          <a:ext cx="1420177" cy="1171646"/>
-        </a:xfrm>
-        <a:prstGeom prst="roundRect">
-          <a:avLst>
-            <a:gd name="adj" fmla="val 10000"/>
-          </a:avLst>
+        <a:prstGeom prst="ellipse">
+          <a:avLst/>
         </a:prstGeom>
         <a:solidFill>
           <a:schemeClr val="accent1">
@@ -1903,13 +1910,45 @@
           <a:schemeClr val="lt1"/>
         </a:fontRef>
       </dsp:style>
+    </dsp:sp>
+    <dsp:sp modelId="{B9CF2E2B-1F7F-094D-9B3F-BFDC7234BBD0}">
+      <dsp:nvSpPr>
+        <dsp:cNvPr id="0" name=""/>
+        <dsp:cNvSpPr/>
+      </dsp:nvSpPr>
+      <dsp:spPr>
+        <a:xfrm>
+          <a:off x="8587323" y="1261872"/>
+          <a:ext cx="1635145" cy="841248"/>
+        </a:xfrm>
+        <a:prstGeom prst="rect">
+          <a:avLst/>
+        </a:prstGeom>
+        <a:noFill/>
+        <a:ln>
+          <a:noFill/>
+        </a:ln>
+        <a:effectLst/>
+      </dsp:spPr>
+      <dsp:style>
+        <a:lnRef idx="0">
+          <a:scrgbClr r="0" g="0" b="0"/>
+        </a:lnRef>
+        <a:fillRef idx="0">
+          <a:scrgbClr r="0" g="0" b="0"/>
+        </a:fillRef>
+        <a:effectRef idx="0">
+          <a:scrgbClr r="0" g="0" b="0"/>
+        </a:effectRef>
+        <a:fontRef idx="minor"/>
+      </dsp:style>
       <dsp:txBody>
-        <a:bodyPr spcFirstLastPara="0" vert="horz" wrap="square" lIns="64770" tIns="64770" rIns="64770" bIns="64770" numCol="1" spcCol="1270" anchor="ctr" anchorCtr="0">
+        <a:bodyPr spcFirstLastPara="0" vert="horz" wrap="square" lIns="106680" tIns="106680" rIns="106680" bIns="106680" numCol="1" spcCol="1270" anchor="t" anchorCtr="0">
           <a:noAutofit/>
         </a:bodyPr>
         <a:lstStyle/>
         <a:p>
-          <a:pPr marL="0" lvl="0" indent="0" algn="ctr" defTabSz="755650" rtl="0">
+          <a:pPr marL="0" lvl="0" indent="0" algn="ctr" defTabSz="666750" rtl="0">
             <a:lnSpc>
               <a:spcPct val="90000"/>
             </a:lnSpc>
@@ -1922,101 +1961,28 @@
             <a:buNone/>
           </a:pPr>
           <a:r>
-            <a:rPr lang="en-US" sz="1700" kern="1200"/>
-            <a:t>Public Launch (Apr 30)</a:t>
+            <a:rPr lang="en-US" sz="1500" kern="1200" dirty="0"/>
+            <a:t>Postmortem &amp; Retrospective (May 15)</a:t>
           </a:r>
-          <a:endParaRPr lang="en-US" sz="1700" kern="1200" dirty="0"/>
         </a:p>
       </dsp:txBody>
       <dsp:txXfrm>
-        <a:off x="7987310" y="500052"/>
-        <a:ext cx="1351545" cy="1103014"/>
+        <a:off x="8587323" y="1261872"/>
+        <a:ext cx="1635145" cy="841248"/>
       </dsp:txXfrm>
     </dsp:sp>
-    <dsp:sp modelId="{73342E72-052B-BE48-8EEF-AAA93E58A1AC}">
+    <dsp:sp modelId="{D674BEE5-E22E-8448-B548-A7F269C0ABAF}">
       <dsp:nvSpPr>
         <dsp:cNvPr id="0" name=""/>
         <dsp:cNvSpPr/>
       </dsp:nvSpPr>
       <dsp:spPr>
         <a:xfrm>
-          <a:off x="9515189" y="875457"/>
-          <a:ext cx="301077" cy="352204"/>
+          <a:off x="9299740" y="946404"/>
+          <a:ext cx="210312" cy="210312"/>
         </a:xfrm>
-        <a:prstGeom prst="rightArrow">
-          <a:avLst>
-            <a:gd name="adj1" fmla="val 60000"/>
-            <a:gd name="adj2" fmla="val 50000"/>
-          </a:avLst>
-        </a:prstGeom>
-        <a:solidFill>
-          <a:schemeClr val="accent1">
-            <a:tint val="60000"/>
-            <a:hueOff val="0"/>
-            <a:satOff val="0"/>
-            <a:lumOff val="0"/>
-            <a:alphaOff val="0"/>
-          </a:schemeClr>
-        </a:solidFill>
-        <a:ln>
-          <a:noFill/>
-        </a:ln>
-        <a:effectLst/>
-      </dsp:spPr>
-      <dsp:style>
-        <a:lnRef idx="0">
-          <a:scrgbClr r="0" g="0" b="0"/>
-        </a:lnRef>
-        <a:fillRef idx="1">
-          <a:scrgbClr r="0" g="0" b="0"/>
-        </a:fillRef>
-        <a:effectRef idx="0">
-          <a:scrgbClr r="0" g="0" b="0"/>
-        </a:effectRef>
-        <a:fontRef idx="minor">
-          <a:schemeClr val="lt1"/>
-        </a:fontRef>
-      </dsp:style>
-      <dsp:txBody>
-        <a:bodyPr spcFirstLastPara="0" vert="horz" wrap="square" lIns="0" tIns="0" rIns="0" bIns="0" numCol="1" spcCol="1270" anchor="ctr" anchorCtr="0">
-          <a:noAutofit/>
-        </a:bodyPr>
-        <a:lstStyle/>
-        <a:p>
-          <a:pPr marL="0" lvl="0" indent="0" algn="ctr" defTabSz="622300">
-            <a:lnSpc>
-              <a:spcPct val="90000"/>
-            </a:lnSpc>
-            <a:spcBef>
-              <a:spcPct val="0"/>
-            </a:spcBef>
-            <a:spcAft>
-              <a:spcPct val="35000"/>
-            </a:spcAft>
-            <a:buNone/>
-          </a:pPr>
-          <a:endParaRPr lang="en-US" sz="1400" kern="1200"/>
-        </a:p>
-      </dsp:txBody>
-      <dsp:txXfrm>
-        <a:off x="9515189" y="945898"/>
-        <a:ext cx="210754" cy="211322"/>
-      </dsp:txXfrm>
-    </dsp:sp>
-    <dsp:sp modelId="{AA0C9CB3-D071-984D-B670-FE8F51E65083}">
-      <dsp:nvSpPr>
-        <dsp:cNvPr id="0" name=""/>
-        <dsp:cNvSpPr/>
-      </dsp:nvSpPr>
-      <dsp:spPr>
-        <a:xfrm>
-          <a:off x="9941242" y="465736"/>
-          <a:ext cx="1420177" cy="1171646"/>
-        </a:xfrm>
-        <a:prstGeom prst="roundRect">
-          <a:avLst>
-            <a:gd name="adj" fmla="val 10000"/>
-          </a:avLst>
+        <a:prstGeom prst="ellipse">
+          <a:avLst/>
         </a:prstGeom>
         <a:solidFill>
           <a:schemeClr val="accent1">
@@ -2053,46 +2019,19 @@
           <a:schemeClr val="lt1"/>
         </a:fontRef>
       </dsp:style>
-      <dsp:txBody>
-        <a:bodyPr spcFirstLastPara="0" vert="horz" wrap="square" lIns="64770" tIns="64770" rIns="64770" bIns="64770" numCol="1" spcCol="1270" anchor="ctr" anchorCtr="0">
-          <a:noAutofit/>
-        </a:bodyPr>
-        <a:lstStyle/>
-        <a:p>
-          <a:pPr marL="0" lvl="0" indent="0" algn="ctr" defTabSz="755650" rtl="0">
-            <a:lnSpc>
-              <a:spcPct val="90000"/>
-            </a:lnSpc>
-            <a:spcBef>
-              <a:spcPct val="0"/>
-            </a:spcBef>
-            <a:spcAft>
-              <a:spcPct val="35000"/>
-            </a:spcAft>
-            <a:buNone/>
-          </a:pPr>
-          <a:r>
-            <a:rPr lang="en-US" sz="1700" kern="1200" dirty="0"/>
-            <a:t>Postmortem &amp; Retrospective (May 15)</a:t>
-          </a:r>
-        </a:p>
-      </dsp:txBody>
-      <dsp:txXfrm>
-        <a:off x="9975558" y="500052"/>
-        <a:ext cx="1351545" cy="1103014"/>
-      </dsp:txXfrm>
     </dsp:sp>
   </dsp:spTree>
 </dsp:drawing>
 </file>
 
 <file path=ppt/diagrams/layout1.xml><?xml version="1.0" encoding="utf-8"?>
-<dgm:layoutDef xmlns:dgm="http://schemas.openxmlformats.org/drawingml/2006/diagram" xmlns:a="http://schemas.openxmlformats.org/drawingml/2006/main" uniqueId="urn:microsoft.com/office/officeart/2005/8/layout/process1">
+<dgm:layoutDef xmlns:dgm="http://schemas.openxmlformats.org/drawingml/2006/diagram" xmlns:a="http://schemas.openxmlformats.org/drawingml/2006/main" uniqueId="urn:microsoft.com/office/officeart/2005/8/layout/hProcess11">
   <dgm:title val=""/>
   <dgm:desc val=""/>
   <dgm:catLst>
-    <dgm:cat type="process" pri="1000"/>
-    <dgm:cat type="convert" pri="15000"/>
+    <dgm:cat type="process" pri="8000"/>
+    <dgm:cat type="timeline" pri="103"/>
+    <dgm:cat type="convert" pri="14000"/>
   </dgm:catLst>
   <dgm:sampData useDef="1">
     <dgm:dataModel>
@@ -2109,8 +2048,8 @@
         <dgm:pt modelId="2"/>
       </dgm:ptLst>
       <dgm:cxnLst>
-        <dgm:cxn modelId="3" srcId="0" destId="1" srcOrd="0" destOrd="0"/>
-        <dgm:cxn modelId="4" srcId="0" destId="2" srcOrd="1" destOrd="0"/>
+        <dgm:cxn modelId="4" srcId="0" destId="1" srcOrd="0" destOrd="0"/>
+        <dgm:cxn modelId="5" srcId="0" destId="2" srcOrd="1" destOrd="0"/>
       </dgm:cxnLst>
       <dgm:bg/>
       <dgm:whole/>
@@ -2140,94 +2079,220 @@
       <dgm:dir/>
       <dgm:resizeHandles val="exact"/>
     </dgm:varLst>
-    <dgm:choose name="Name1">
-      <dgm:if name="Name2" func="var" arg="dir" op="equ" val="norm">
-        <dgm:alg type="lin"/>
-      </dgm:if>
-      <dgm:else name="Name3">
-        <dgm:alg type="lin">
-          <dgm:param type="linDir" val="fromR"/>
-        </dgm:alg>
-      </dgm:else>
-    </dgm:choose>
+    <dgm:alg type="composite"/>
     <dgm:shape xmlns:r="http://schemas.openxmlformats.org/officeDocument/2006/relationships" r:blip="">
       <dgm:adjLst/>
     </dgm:shape>
     <dgm:presOf/>
-    <dgm:constrLst>
-      <dgm:constr type="w" for="ch" ptType="node" refType="w"/>
-      <dgm:constr type="h" for="ch" ptType="node" op="equ"/>
-      <dgm:constr type="primFontSz" for="ch" ptType="node" op="equ" val="65"/>
-      <dgm:constr type="w" for="ch" ptType="sibTrans" refType="w" refFor="ch" refPtType="node" op="equ" fact="0.4"/>
-      <dgm:constr type="h" for="ch" ptType="sibTrans" op="equ"/>
-      <dgm:constr type="primFontSz" for="des" forName="connectorText" op="equ" val="55"/>
-      <dgm:constr type="primFontSz" for="des" forName="connectorText" refType="primFontSz" refFor="ch" refPtType="node" op="lte" fact="0.8"/>
-    </dgm:constrLst>
+    <dgm:choose name="Name1">
+      <dgm:if name="Name2" func="var" arg="dir" op="equ" val="norm">
+        <dgm:constrLst>
+          <dgm:constr type="w" for="ch" forName="arrow" refType="w"/>
+          <dgm:constr type="h" for="ch" forName="arrow" refType="h" fact="0.4"/>
+          <dgm:constr type="ctrY" for="ch" forName="arrow" refType="h" fact="0.5"/>
+          <dgm:constr type="l" for="ch" forName="arrow"/>
+          <dgm:constr type="w" for="ch" forName="points" refType="w" fact="0.9"/>
+          <dgm:constr type="h" for="ch" forName="points" refType="h"/>
+          <dgm:constr type="t" for="ch" forName="points"/>
+          <dgm:constr type="l" for="ch" forName="points"/>
+        </dgm:constrLst>
+      </dgm:if>
+      <dgm:else name="Name3">
+        <dgm:constrLst>
+          <dgm:constr type="w" for="ch" forName="arrow" refType="w"/>
+          <dgm:constr type="h" for="ch" forName="arrow" refType="h" fact="0.4"/>
+          <dgm:constr type="ctrY" for="ch" forName="arrow" refType="h" fact="0.5"/>
+          <dgm:constr type="r" for="ch" forName="arrow" refType="w"/>
+          <dgm:constr type="w" for="ch" forName="points" refType="w" fact="0.9"/>
+          <dgm:constr type="h" for="ch" forName="points" refType="h"/>
+          <dgm:constr type="t" for="ch" forName="points"/>
+          <dgm:constr type="r" for="ch" forName="points" refType="w"/>
+        </dgm:constrLst>
+      </dgm:else>
+    </dgm:choose>
     <dgm:ruleLst/>
-    <dgm:forEach name="nodesForEach" axis="ch" ptType="node">
-      <dgm:layoutNode name="node">
-        <dgm:varLst>
-          <dgm:bulletEnabled val="1"/>
-        </dgm:varLst>
-        <dgm:alg type="tx"/>
-        <dgm:shape xmlns:r="http://schemas.openxmlformats.org/officeDocument/2006/relationships" type="roundRect" r:blip="">
-          <dgm:adjLst>
-            <dgm:adj idx="1" val="0.1"/>
-          </dgm:adjLst>
-        </dgm:shape>
-        <dgm:presOf axis="desOrSelf" ptType="node"/>
-        <dgm:constrLst>
-          <dgm:constr type="h" refType="w" fact="0.6"/>
-          <dgm:constr type="tMarg" refType="primFontSz" fact="0.3"/>
-          <dgm:constr type="bMarg" refType="primFontSz" fact="0.3"/>
-          <dgm:constr type="lMarg" refType="primFontSz" fact="0.3"/>
-          <dgm:constr type="rMarg" refType="primFontSz" fact="0.3"/>
-        </dgm:constrLst>
-        <dgm:ruleLst>
-          <dgm:rule type="primFontSz" val="18" fact="NaN" max="NaN"/>
-          <dgm:rule type="h" val="NaN" fact="1.5" max="NaN"/>
-          <dgm:rule type="primFontSz" val="5" fact="NaN" max="NaN"/>
-          <dgm:rule type="h" val="INF" fact="NaN" max="NaN"/>
-        </dgm:ruleLst>
-      </dgm:layoutNode>
-      <dgm:forEach name="sibTransForEach" axis="followSib" ptType="sibTrans" cnt="1">
-        <dgm:layoutNode name="sibTrans">
-          <dgm:alg type="conn">
-            <dgm:param type="begPts" val="auto"/>
-            <dgm:param type="endPts" val="auto"/>
-          </dgm:alg>
-          <dgm:shape xmlns:r="http://schemas.openxmlformats.org/officeDocument/2006/relationships" type="conn" r:blip="">
+    <dgm:layoutNode name="arrow" styleLbl="bgShp">
+      <dgm:alg type="sp"/>
+      <dgm:choose name="Name4">
+        <dgm:if name="Name5" func="var" arg="dir" op="equ" val="norm">
+          <dgm:shape xmlns:r="http://schemas.openxmlformats.org/officeDocument/2006/relationships" type="notchedRightArrow" r:blip="">
             <dgm:adjLst/>
           </dgm:shape>
-          <dgm:presOf axis="self"/>
-          <dgm:constrLst>
-            <dgm:constr type="h" refType="w" fact="0.62"/>
-            <dgm:constr type="connDist"/>
-            <dgm:constr type="begPad" refType="connDist" fact="0.25"/>
-            <dgm:constr type="endPad" refType="connDist" fact="0.22"/>
-          </dgm:constrLst>
-          <dgm:ruleLst/>
-          <dgm:layoutNode name="connectorText">
-            <dgm:alg type="tx">
-              <dgm:param type="autoTxRot" val="grav"/>
-            </dgm:alg>
-            <dgm:shape xmlns:r="http://schemas.openxmlformats.org/officeDocument/2006/relationships" type="conn" r:blip="" hideGeom="1">
+        </dgm:if>
+        <dgm:else name="Name6">
+          <dgm:shape xmlns:r="http://schemas.openxmlformats.org/officeDocument/2006/relationships" rot="180" type="notchedRightArrow" r:blip="">
+            <dgm:adjLst/>
+          </dgm:shape>
+        </dgm:else>
+      </dgm:choose>
+      <dgm:presOf/>
+      <dgm:constrLst/>
+      <dgm:ruleLst/>
+    </dgm:layoutNode>
+    <dgm:layoutNode name="points">
+      <dgm:choose name="Name7">
+        <dgm:if name="Name8" func="var" arg="dir" op="equ" val="norm">
+          <dgm:alg type="lin">
+            <dgm:param type="linDir" val="fromL"/>
+          </dgm:alg>
+        </dgm:if>
+        <dgm:else name="Name9">
+          <dgm:alg type="lin">
+            <dgm:param type="linDir" val="fromR"/>
+          </dgm:alg>
+        </dgm:else>
+      </dgm:choose>
+      <dgm:shape xmlns:r="http://schemas.openxmlformats.org/officeDocument/2006/relationships" r:blip="">
+        <dgm:adjLst/>
+      </dgm:shape>
+      <dgm:presOf/>
+      <dgm:constrLst>
+        <dgm:constr type="w" for="ch" forName="compositeA" refType="w"/>
+        <dgm:constr type="h" for="ch" forName="compositeA" refType="h"/>
+        <dgm:constr type="w" for="ch" forName="compositeB" refType="w" refFor="ch" refForName="compositeA" op="equ"/>
+        <dgm:constr type="h" for="ch" forName="compositeB" refType="h" refFor="ch" refForName="compositeA" op="equ"/>
+        <dgm:constr type="primFontSz" for="des" ptType="node" op="equ" val="65"/>
+        <dgm:constr type="w" for="ch" forName="space" refType="w" refFor="ch" refForName="compositeA" op="equ" fact="0.05"/>
+      </dgm:constrLst>
+      <dgm:ruleLst/>
+      <dgm:forEach name="Name10" axis="ch" ptType="node">
+        <dgm:choose name="Name11">
+          <dgm:if name="Name12" axis="self" ptType="node" func="posOdd" op="equ" val="1">
+            <dgm:layoutNode name="compositeA">
+              <dgm:alg type="composite"/>
+              <dgm:shape xmlns:r="http://schemas.openxmlformats.org/officeDocument/2006/relationships" r:blip="">
+                <dgm:adjLst/>
+              </dgm:shape>
+              <dgm:presOf/>
+              <dgm:constrLst>
+                <dgm:constr type="w" for="ch" forName="textA" refType="w"/>
+                <dgm:constr type="h" for="ch" forName="textA" refType="h" fact="0.4"/>
+                <dgm:constr type="t" for="ch" forName="textA"/>
+                <dgm:constr type="l" for="ch" forName="textA"/>
+                <dgm:constr type="h" for="ch" forName="circleA" refType="h" fact="0.1"/>
+                <dgm:constr type="h" for="ch" forName="circleA" refType="w" op="lte"/>
+                <dgm:constr type="w" for="ch" forName="circleA" refType="h" refFor="ch" refForName="circleA" op="equ"/>
+                <dgm:constr type="ctrY" for="ch" forName="circleA" refType="h" fact="0.5"/>
+                <dgm:constr type="ctrX" for="ch" forName="circleA" refType="w" refFor="ch" refForName="textA" fact="0.5"/>
+                <dgm:constr type="w" for="ch" forName="spaceA" refType="w"/>
+                <dgm:constr type="h" for="ch" forName="spaceA" refType="h" fact="0.4"/>
+                <dgm:constr type="b" for="ch" forName="spaceA" refType="h"/>
+                <dgm:constr type="l" for="ch" forName="spaceA"/>
+              </dgm:constrLst>
+              <dgm:ruleLst/>
+              <dgm:layoutNode name="textA" styleLbl="revTx">
+                <dgm:varLst>
+                  <dgm:bulletEnabled val="1"/>
+                </dgm:varLst>
+                <dgm:alg type="tx">
+                  <dgm:param type="txAnchorVert" val="b"/>
+                  <dgm:param type="txAnchorVertCh" val="b"/>
+                  <dgm:param type="txAnchorHorzCh" val="ctr"/>
+                </dgm:alg>
+                <dgm:shape xmlns:r="http://schemas.openxmlformats.org/officeDocument/2006/relationships" type="rect" r:blip="">
+                  <dgm:adjLst/>
+                </dgm:shape>
+                <dgm:presOf axis="desOrSelf" ptType="node"/>
+                <dgm:constrLst/>
+                <dgm:ruleLst>
+                  <dgm:rule type="primFontSz" val="5" fact="NaN" max="NaN"/>
+                </dgm:ruleLst>
+              </dgm:layoutNode>
+              <dgm:layoutNode name="circleA">
+                <dgm:alg type="sp"/>
+                <dgm:shape xmlns:r="http://schemas.openxmlformats.org/officeDocument/2006/relationships" type="ellipse" r:blip="">
+                  <dgm:adjLst/>
+                </dgm:shape>
+                <dgm:presOf/>
+                <dgm:constrLst/>
+                <dgm:ruleLst/>
+              </dgm:layoutNode>
+              <dgm:layoutNode name="spaceA">
+                <dgm:alg type="sp"/>
+                <dgm:shape xmlns:r="http://schemas.openxmlformats.org/officeDocument/2006/relationships" r:blip="">
+                  <dgm:adjLst/>
+                </dgm:shape>
+                <dgm:presOf/>
+                <dgm:constrLst/>
+                <dgm:ruleLst/>
+              </dgm:layoutNode>
+            </dgm:layoutNode>
+          </dgm:if>
+          <dgm:else name="Name13">
+            <dgm:layoutNode name="compositeB">
+              <dgm:alg type="composite"/>
+              <dgm:shape xmlns:r="http://schemas.openxmlformats.org/officeDocument/2006/relationships" r:blip="">
+                <dgm:adjLst/>
+              </dgm:shape>
+              <dgm:presOf/>
+              <dgm:constrLst>
+                <dgm:constr type="w" for="ch" forName="textB" refType="w"/>
+                <dgm:constr type="h" for="ch" forName="textB" refType="h" fact="0.4"/>
+                <dgm:constr type="b" for="ch" forName="textB" refType="h"/>
+                <dgm:constr type="l" for="ch" forName="textB"/>
+                <dgm:constr type="h" for="ch" forName="circleB" refType="h" fact="0.1"/>
+                <dgm:constr type="w" for="ch" forName="circleB" refType="h" refFor="ch" refForName="circleB" op="equ"/>
+                <dgm:constr type="h" for="ch" forName="circleB" refType="w" op="lte"/>
+                <dgm:constr type="ctrY" for="ch" forName="circleB" refType="h" fact="0.5"/>
+                <dgm:constr type="ctrX" for="ch" forName="circleB" refType="w" refFor="ch" refForName="textB" fact="0.5"/>
+                <dgm:constr type="w" for="ch" forName="spaceB" refType="w"/>
+                <dgm:constr type="h" for="ch" forName="spaceB" refType="h" fact="0.4"/>
+                <dgm:constr type="t" for="ch" forName="spaceB"/>
+                <dgm:constr type="l" for="ch" forName="spaceB"/>
+              </dgm:constrLst>
+              <dgm:ruleLst/>
+              <dgm:layoutNode name="textB" styleLbl="revTx">
+                <dgm:varLst>
+                  <dgm:bulletEnabled val="1"/>
+                </dgm:varLst>
+                <dgm:alg type="tx">
+                  <dgm:param type="txAnchorVert" val="t"/>
+                  <dgm:param type="txAnchorVertCh" val="t"/>
+                  <dgm:param type="txAnchorHorzCh" val="ctr"/>
+                </dgm:alg>
+                <dgm:shape xmlns:r="http://schemas.openxmlformats.org/officeDocument/2006/relationships" type="rect" r:blip="">
+                  <dgm:adjLst/>
+                </dgm:shape>
+                <dgm:presOf axis="desOrSelf" ptType="node"/>
+                <dgm:constrLst/>
+                <dgm:ruleLst>
+                  <dgm:rule type="primFontSz" val="5" fact="NaN" max="NaN"/>
+                </dgm:ruleLst>
+              </dgm:layoutNode>
+              <dgm:layoutNode name="circleB">
+                <dgm:alg type="sp"/>
+                <dgm:shape xmlns:r="http://schemas.openxmlformats.org/officeDocument/2006/relationships" type="ellipse" r:blip="">
+                  <dgm:adjLst/>
+                </dgm:shape>
+                <dgm:presOf/>
+                <dgm:constrLst/>
+                <dgm:ruleLst/>
+              </dgm:layoutNode>
+              <dgm:layoutNode name="spaceB">
+                <dgm:alg type="sp"/>
+                <dgm:shape xmlns:r="http://schemas.openxmlformats.org/officeDocument/2006/relationships" r:blip="">
+                  <dgm:adjLst/>
+                </dgm:shape>
+                <dgm:presOf/>
+                <dgm:constrLst/>
+                <dgm:ruleLst/>
+              </dgm:layoutNode>
+            </dgm:layoutNode>
+          </dgm:else>
+        </dgm:choose>
+        <dgm:forEach name="Name14" axis="followSib" ptType="sibTrans" cnt="1">
+          <dgm:layoutNode name="space">
+            <dgm:alg type="sp"/>
+            <dgm:shape xmlns:r="http://schemas.openxmlformats.org/officeDocument/2006/relationships" r:blip="">
               <dgm:adjLst/>
             </dgm:shape>
-            <dgm:presOf axis="self"/>
-            <dgm:constrLst>
-              <dgm:constr type="lMarg"/>
-              <dgm:constr type="rMarg"/>
-              <dgm:constr type="tMarg"/>
-              <dgm:constr type="bMarg"/>
-            </dgm:constrLst>
-            <dgm:ruleLst>
-              <dgm:rule type="primFontSz" val="5" fact="NaN" max="NaN"/>
-            </dgm:ruleLst>
+            <dgm:presOf/>
+            <dgm:constrLst/>
+            <dgm:ruleLst/>
           </dgm:layoutNode>
-        </dgm:layoutNode>
+        </dgm:forEach>
       </dgm:forEach>
-    </dgm:forEach>
+    </dgm:layoutNode>
   </dgm:layoutNode>
 </dgm:layoutDef>
 </file>
@@ -3264,6 +3329,439 @@
     </dgm:style>
   </dgm:styleLbl>
 </dgm:styleDef>
+</file>
+
+<file path=ppt/notesMasters/notesMaster1.xml><?xml version="1.0" encoding="utf-8"?>
+<p:notesMaster xmlns:a="http://schemas.openxmlformats.org/drawingml/2006/main" xmlns:r="http://schemas.openxmlformats.org/officeDocument/2006/relationships" xmlns:p="http://schemas.openxmlformats.org/presentationml/2006/main">
+  <p:cSld>
+    <p:bg>
+      <p:bgRef idx="1001">
+        <a:schemeClr val="bg1"/>
+      </p:bgRef>
+    </p:bg>
+    <p:spTree>
+      <p:nvGrpSpPr>
+        <p:cNvPr id="1" name=""/>
+        <p:cNvGrpSpPr/>
+        <p:nvPr/>
+      </p:nvGrpSpPr>
+      <p:grpSpPr>
+        <a:xfrm>
+          <a:off x="0" y="0"/>
+          <a:ext cx="0" cy="0"/>
+          <a:chOff x="0" y="0"/>
+          <a:chExt cx="0" cy="0"/>
+        </a:xfrm>
+      </p:grpSpPr>
+      <p:sp>
+        <p:nvSpPr>
+          <p:cNvPr id="2" name="Header Placeholder 1"/>
+          <p:cNvSpPr>
+            <a:spLocks noGrp="1"/>
+          </p:cNvSpPr>
+          <p:nvPr>
+            <p:ph type="hdr" sz="quarter"/>
+          </p:nvPr>
+        </p:nvSpPr>
+        <p:spPr>
+          <a:xfrm>
+            <a:off x="0" y="0"/>
+            <a:ext cx="2971800" cy="458788"/>
+          </a:xfrm>
+          <a:prstGeom prst="rect">
+            <a:avLst/>
+          </a:prstGeom>
+        </p:spPr>
+        <p:txBody>
+          <a:bodyPr vert="horz" lIns="91440" tIns="45720" rIns="91440" bIns="45720" rtlCol="0"/>
+          <a:lstStyle>
+            <a:lvl1pPr algn="l">
+              <a:defRPr sz="1200"/>
+            </a:lvl1pPr>
+          </a:lstStyle>
+          <a:p>
+            <a:endParaRPr lang="en-US"/>
+          </a:p>
+        </p:txBody>
+      </p:sp>
+      <p:sp>
+        <p:nvSpPr>
+          <p:cNvPr id="3" name="Date Placeholder 2"/>
+          <p:cNvSpPr>
+            <a:spLocks noGrp="1"/>
+          </p:cNvSpPr>
+          <p:nvPr>
+            <p:ph type="dt" idx="1"/>
+          </p:nvPr>
+        </p:nvSpPr>
+        <p:spPr>
+          <a:xfrm>
+            <a:off x="3884613" y="0"/>
+            <a:ext cx="2971800" cy="458788"/>
+          </a:xfrm>
+          <a:prstGeom prst="rect">
+            <a:avLst/>
+          </a:prstGeom>
+        </p:spPr>
+        <p:txBody>
+          <a:bodyPr vert="horz" lIns="91440" tIns="45720" rIns="91440" bIns="45720" rtlCol="0"/>
+          <a:lstStyle>
+            <a:lvl1pPr algn="r">
+              <a:defRPr sz="1200"/>
+            </a:lvl1pPr>
+          </a:lstStyle>
+          <a:p>
+            <a:fld id="{8405D2B2-A938-F742-8F98-0EFF68C3D12E}" type="datetimeFigureOut">
+              <a:rPr lang="en-US" smtClean="0"/>
+              <a:t>7/2/26</a:t>
+            </a:fld>
+            <a:endParaRPr lang="en-US"/>
+          </a:p>
+        </p:txBody>
+      </p:sp>
+      <p:sp>
+        <p:nvSpPr>
+          <p:cNvPr id="4" name="Slide Image Placeholder 3"/>
+          <p:cNvSpPr>
+            <a:spLocks noGrp="1" noRot="1" noChangeAspect="1"/>
+          </p:cNvSpPr>
+          <p:nvPr>
+            <p:ph type="sldImg" idx="2"/>
+          </p:nvPr>
+        </p:nvSpPr>
+        <p:spPr>
+          <a:xfrm>
+            <a:off x="685800" y="1143000"/>
+            <a:ext cx="5486400" cy="3086100"/>
+          </a:xfrm>
+          <a:prstGeom prst="rect">
+            <a:avLst/>
+          </a:prstGeom>
+          <a:noFill/>
+          <a:ln w="12700">
+            <a:solidFill>
+              <a:prstClr val="black"/>
+            </a:solidFill>
+          </a:ln>
+        </p:spPr>
+        <p:txBody>
+          <a:bodyPr vert="horz" lIns="91440" tIns="45720" rIns="91440" bIns="45720" rtlCol="0" anchor="ctr"/>
+          <a:lstStyle/>
+          <a:p>
+            <a:endParaRPr lang="en-US"/>
+          </a:p>
+        </p:txBody>
+      </p:sp>
+      <p:sp>
+        <p:nvSpPr>
+          <p:cNvPr id="5" name="Notes Placeholder 4"/>
+          <p:cNvSpPr>
+            <a:spLocks noGrp="1"/>
+          </p:cNvSpPr>
+          <p:nvPr>
+            <p:ph type="body" sz="quarter" idx="3"/>
+          </p:nvPr>
+        </p:nvSpPr>
+        <p:spPr>
+          <a:xfrm>
+            <a:off x="685800" y="4400550"/>
+            <a:ext cx="5486400" cy="3600450"/>
+          </a:xfrm>
+          <a:prstGeom prst="rect">
+            <a:avLst/>
+          </a:prstGeom>
+        </p:spPr>
+        <p:txBody>
+          <a:bodyPr vert="horz" lIns="91440" tIns="45720" rIns="91440" bIns="45720" rtlCol="0"/>
+          <a:lstStyle/>
+          <a:p>
+            <a:pPr lvl="0"/>
+            <a:r>
+              <a:rPr lang="en-US"/>
+              <a:t>Click to edit Master text styles</a:t>
+            </a:r>
+          </a:p>
+          <a:p>
+            <a:pPr lvl="1"/>
+            <a:r>
+              <a:rPr lang="en-US"/>
+              <a:t>Second level</a:t>
+            </a:r>
+          </a:p>
+          <a:p>
+            <a:pPr lvl="2"/>
+            <a:r>
+              <a:rPr lang="en-US"/>
+              <a:t>Third level</a:t>
+            </a:r>
+          </a:p>
+          <a:p>
+            <a:pPr lvl="3"/>
+            <a:r>
+              <a:rPr lang="en-US"/>
+              <a:t>Fourth level</a:t>
+            </a:r>
+          </a:p>
+          <a:p>
+            <a:pPr lvl="4"/>
+            <a:r>
+              <a:rPr lang="en-US"/>
+              <a:t>Fifth level</a:t>
+            </a:r>
+          </a:p>
+        </p:txBody>
+      </p:sp>
+      <p:sp>
+        <p:nvSpPr>
+          <p:cNvPr id="6" name="Footer Placeholder 5"/>
+          <p:cNvSpPr>
+            <a:spLocks noGrp="1"/>
+          </p:cNvSpPr>
+          <p:nvPr>
+            <p:ph type="ftr" sz="quarter" idx="4"/>
+          </p:nvPr>
+        </p:nvSpPr>
+        <p:spPr>
+          <a:xfrm>
+            <a:off x="0" y="8685213"/>
+            <a:ext cx="2971800" cy="458787"/>
+          </a:xfrm>
+          <a:prstGeom prst="rect">
+            <a:avLst/>
+          </a:prstGeom>
+        </p:spPr>
+        <p:txBody>
+          <a:bodyPr vert="horz" lIns="91440" tIns="45720" rIns="91440" bIns="45720" rtlCol="0" anchor="b"/>
+          <a:lstStyle>
+            <a:lvl1pPr algn="l">
+              <a:defRPr sz="1200"/>
+            </a:lvl1pPr>
+          </a:lstStyle>
+          <a:p>
+            <a:endParaRPr lang="en-US"/>
+          </a:p>
+        </p:txBody>
+      </p:sp>
+      <p:sp>
+        <p:nvSpPr>
+          <p:cNvPr id="7" name="Slide Number Placeholder 6"/>
+          <p:cNvSpPr>
+            <a:spLocks noGrp="1"/>
+          </p:cNvSpPr>
+          <p:nvPr>
+            <p:ph type="sldNum" sz="quarter" idx="5"/>
+          </p:nvPr>
+        </p:nvSpPr>
+        <p:spPr>
+          <a:xfrm>
+            <a:off x="3884613" y="8685213"/>
+            <a:ext cx="2971800" cy="458787"/>
+          </a:xfrm>
+          <a:prstGeom prst="rect">
+            <a:avLst/>
+          </a:prstGeom>
+        </p:spPr>
+        <p:txBody>
+          <a:bodyPr vert="horz" lIns="91440" tIns="45720" rIns="91440" bIns="45720" rtlCol="0" anchor="b"/>
+          <a:lstStyle>
+            <a:lvl1pPr algn="r">
+              <a:defRPr sz="1200"/>
+            </a:lvl1pPr>
+          </a:lstStyle>
+          <a:p>
+            <a:fld id="{C3F50F34-EF5B-2344-B9BB-0A2AD8CCB839}" type="slidenum">
+              <a:rPr lang="en-US" smtClean="0"/>
+              <a:t>‹#›</a:t>
+            </a:fld>
+            <a:endParaRPr lang="en-US"/>
+          </a:p>
+        </p:txBody>
+      </p:sp>
+    </p:spTree>
+    <p:extLst>
+      <p:ext uri="{BB962C8B-B14F-4D97-AF65-F5344CB8AC3E}">
+        <p14:creationId xmlns:p14="http://schemas.microsoft.com/office/powerpoint/2010/main" val="407815205"/>
+      </p:ext>
+    </p:extLst>
+  </p:cSld>
+  <p:clrMap bg1="lt1" tx1="dk1" bg2="lt2" tx2="dk2" accent1="accent1" accent2="accent2" accent3="accent3" accent4="accent4" accent5="accent5" accent6="accent6" hlink="hlink" folHlink="folHlink"/>
+  <p:notesStyle>
+    <a:lvl1pPr marL="0" algn="l" defTabSz="914400" rtl="0" eaLnBrk="1" latinLnBrk="0" hangingPunct="1">
+      <a:defRPr sz="1200" kern="1200">
+        <a:solidFill>
+          <a:schemeClr val="tx1"/>
+        </a:solidFill>
+        <a:latin typeface="+mn-lt"/>
+        <a:ea typeface="+mn-ea"/>
+        <a:cs typeface="+mn-cs"/>
+      </a:defRPr>
+    </a:lvl1pPr>
+    <a:lvl2pPr marL="457200" algn="l" defTabSz="914400" rtl="0" eaLnBrk="1" latinLnBrk="0" hangingPunct="1">
+      <a:defRPr sz="1200" kern="1200">
+        <a:solidFill>
+          <a:schemeClr val="tx1"/>
+        </a:solidFill>
+        <a:latin typeface="+mn-lt"/>
+        <a:ea typeface="+mn-ea"/>
+        <a:cs typeface="+mn-cs"/>
+      </a:defRPr>
+    </a:lvl2pPr>
+    <a:lvl3pPr marL="914400" algn="l" defTabSz="914400" rtl="0" eaLnBrk="1" latinLnBrk="0" hangingPunct="1">
+      <a:defRPr sz="1200" kern="1200">
+        <a:solidFill>
+          <a:schemeClr val="tx1"/>
+        </a:solidFill>
+        <a:latin typeface="+mn-lt"/>
+        <a:ea typeface="+mn-ea"/>
+        <a:cs typeface="+mn-cs"/>
+      </a:defRPr>
+    </a:lvl3pPr>
+    <a:lvl4pPr marL="1371600" algn="l" defTabSz="914400" rtl="0" eaLnBrk="1" latinLnBrk="0" hangingPunct="1">
+      <a:defRPr sz="1200" kern="1200">
+        <a:solidFill>
+          <a:schemeClr val="tx1"/>
+        </a:solidFill>
+        <a:latin typeface="+mn-lt"/>
+        <a:ea typeface="+mn-ea"/>
+        <a:cs typeface="+mn-cs"/>
+      </a:defRPr>
+    </a:lvl4pPr>
+    <a:lvl5pPr marL="1828800" algn="l" defTabSz="914400" rtl="0" eaLnBrk="1" latinLnBrk="0" hangingPunct="1">
+      <a:defRPr sz="1200" kern="1200">
+        <a:solidFill>
+          <a:schemeClr val="tx1"/>
+        </a:solidFill>
+        <a:latin typeface="+mn-lt"/>
+        <a:ea typeface="+mn-ea"/>
+        <a:cs typeface="+mn-cs"/>
+      </a:defRPr>
+    </a:lvl5pPr>
+    <a:lvl6pPr marL="2286000" algn="l" defTabSz="914400" rtl="0" eaLnBrk="1" latinLnBrk="0" hangingPunct="1">
+      <a:defRPr sz="1200" kern="1200">
+        <a:solidFill>
+          <a:schemeClr val="tx1"/>
+        </a:solidFill>
+        <a:latin typeface="+mn-lt"/>
+        <a:ea typeface="+mn-ea"/>
+        <a:cs typeface="+mn-cs"/>
+      </a:defRPr>
+    </a:lvl6pPr>
+    <a:lvl7pPr marL="2743200" algn="l" defTabSz="914400" rtl="0" eaLnBrk="1" latinLnBrk="0" hangingPunct="1">
+      <a:defRPr sz="1200" kern="1200">
+        <a:solidFill>
+          <a:schemeClr val="tx1"/>
+        </a:solidFill>
+        <a:latin typeface="+mn-lt"/>
+        <a:ea typeface="+mn-ea"/>
+        <a:cs typeface="+mn-cs"/>
+      </a:defRPr>
+    </a:lvl7pPr>
+    <a:lvl8pPr marL="3200400" algn="l" defTabSz="914400" rtl="0" eaLnBrk="1" latinLnBrk="0" hangingPunct="1">
+      <a:defRPr sz="1200" kern="1200">
+        <a:solidFill>
+          <a:schemeClr val="tx1"/>
+        </a:solidFill>
+        <a:latin typeface="+mn-lt"/>
+        <a:ea typeface="+mn-ea"/>
+        <a:cs typeface="+mn-cs"/>
+      </a:defRPr>
+    </a:lvl8pPr>
+    <a:lvl9pPr marL="3657600" algn="l" defTabSz="914400" rtl="0" eaLnBrk="1" latinLnBrk="0" hangingPunct="1">
+      <a:defRPr sz="1200" kern="1200">
+        <a:solidFill>
+          <a:schemeClr val="tx1"/>
+        </a:solidFill>
+        <a:latin typeface="+mn-lt"/>
+        <a:ea typeface="+mn-ea"/>
+        <a:cs typeface="+mn-cs"/>
+      </a:defRPr>
+    </a:lvl9pPr>
+  </p:notesStyle>
+</p:notesMaster>
+</file>
+
+<file path=ppt/notesSlides/notesSlide1.xml><?xml version="1.0" encoding="utf-8"?>
+<p:notes xmlns:a="http://schemas.openxmlformats.org/drawingml/2006/main" xmlns:r="http://schemas.openxmlformats.org/officeDocument/2006/relationships" xmlns:p="http://schemas.openxmlformats.org/presentationml/2006/main">
+  <p:cSld>
+    <p:spTree>
+      <p:nvGrpSpPr>
+        <p:cNvPr id="1" name=""/>
+        <p:cNvGrpSpPr/>
+        <p:nvPr/>
+      </p:nvGrpSpPr>
+      <p:grpSpPr>
+        <a:xfrm>
+          <a:off x="0" y="0"/>
+          <a:ext cx="0" cy="0"/>
+          <a:chOff x="0" y="0"/>
+          <a:chExt cx="0" cy="0"/>
+        </a:xfrm>
+      </p:grpSpPr>
+      <p:sp>
+        <p:nvSpPr>
+          <p:cNvPr id="2" name="Slide Image Placeholder 1"/>
+          <p:cNvSpPr>
+            <a:spLocks noGrp="1" noRot="1" noChangeAspect="1"/>
+          </p:cNvSpPr>
+          <p:nvPr>
+            <p:ph type="sldImg"/>
+          </p:nvPr>
+        </p:nvSpPr>
+        <p:spPr/>
+      </p:sp>
+      <p:sp>
+        <p:nvSpPr>
+          <p:cNvPr id="3" name="Notes Placeholder 2"/>
+          <p:cNvSpPr>
+            <a:spLocks noGrp="1"/>
+          </p:cNvSpPr>
+          <p:nvPr>
+            <p:ph type="body" idx="1"/>
+          </p:nvPr>
+        </p:nvSpPr>
+        <p:spPr/>
+        <p:txBody>
+          <a:bodyPr/>
+          <a:lstStyle/>
+          <a:p>
+            <a:endParaRPr lang="en-US" dirty="0"/>
+          </a:p>
+        </p:txBody>
+      </p:sp>
+      <p:sp>
+        <p:nvSpPr>
+          <p:cNvPr id="4" name="Slide Number Placeholder 3"/>
+          <p:cNvSpPr>
+            <a:spLocks noGrp="1"/>
+          </p:cNvSpPr>
+          <p:nvPr>
+            <p:ph type="sldNum" sz="quarter" idx="5"/>
+          </p:nvPr>
+        </p:nvSpPr>
+        <p:spPr/>
+        <p:txBody>
+          <a:bodyPr/>
+          <a:lstStyle/>
+          <a:p>
+            <a:fld id="{C3F50F34-EF5B-2344-B9BB-0A2AD8CCB839}" type="slidenum">
+              <a:rPr lang="en-US" smtClean="0"/>
+              <a:t>2</a:t>
+            </a:fld>
+            <a:endParaRPr lang="en-US"/>
+          </a:p>
+        </p:txBody>
+      </p:sp>
+    </p:spTree>
+    <p:extLst>
+      <p:ext uri="{BB962C8B-B14F-4D97-AF65-F5344CB8AC3E}">
+        <p14:creationId xmlns:p14="http://schemas.microsoft.com/office/powerpoint/2010/main" val="1652772199"/>
+      </p:ext>
+    </p:extLst>
+  </p:cSld>
+  <p:clrMapOvr>
+    <a:masterClrMapping/>
+  </p:clrMapOvr>
+</p:notes>
 </file>
 
 <file path=ppt/slideLayouts/slideLayout1.xml><?xml version="1.0" encoding="utf-8"?>
@@ -3445,7 +3943,7 @@
           <a:p>
             <a:fld id="{5BCAD085-E8A6-8845-BD4E-CB4CCA059FC4}" type="datetimeFigureOut">
               <a:rPr lang="en-US" smtClean="0"/>
-              <a:t>9/22/25</a:t>
+              <a:t>7/2/26</a:t>
             </a:fld>
             <a:endParaRPr lang="en-US"/>
           </a:p>
@@ -3613,7 +4111,7 @@
           <a:p>
             <a:fld id="{5BCAD085-E8A6-8845-BD4E-CB4CCA059FC4}" type="datetimeFigureOut">
               <a:rPr lang="en-US" smtClean="0"/>
-              <a:t>9/22/25</a:t>
+              <a:t>7/2/26</a:t>
             </a:fld>
             <a:endParaRPr lang="en-US"/>
           </a:p>
@@ -3791,7 +4289,7 @@
           <a:p>
             <a:fld id="{5BCAD085-E8A6-8845-BD4E-CB4CCA059FC4}" type="datetimeFigureOut">
               <a:rPr lang="en-US" smtClean="0"/>
-              <a:t>9/22/25</a:t>
+              <a:t>7/2/26</a:t>
             </a:fld>
             <a:endParaRPr lang="en-US"/>
           </a:p>
@@ -3959,7 +4457,7 @@
           <a:p>
             <a:fld id="{5BCAD085-E8A6-8845-BD4E-CB4CCA059FC4}" type="datetimeFigureOut">
               <a:rPr lang="en-US" smtClean="0"/>
-              <a:t>9/22/25</a:t>
+              <a:t>7/2/26</a:t>
             </a:fld>
             <a:endParaRPr lang="en-US"/>
           </a:p>
@@ -4204,7 +4702,7 @@
           <a:p>
             <a:fld id="{5BCAD085-E8A6-8845-BD4E-CB4CCA059FC4}" type="datetimeFigureOut">
               <a:rPr lang="en-US" smtClean="0"/>
-              <a:t>9/22/25</a:t>
+              <a:t>7/2/26</a:t>
             </a:fld>
             <a:endParaRPr lang="en-US"/>
           </a:p>
@@ -4489,7 +4987,7 @@
           <a:p>
             <a:fld id="{5BCAD085-E8A6-8845-BD4E-CB4CCA059FC4}" type="datetimeFigureOut">
               <a:rPr lang="en-US" smtClean="0"/>
-              <a:t>9/22/25</a:t>
+              <a:t>7/2/26</a:t>
             </a:fld>
             <a:endParaRPr lang="en-US"/>
           </a:p>
@@ -4908,7 +5406,7 @@
           <a:p>
             <a:fld id="{5BCAD085-E8A6-8845-BD4E-CB4CCA059FC4}" type="datetimeFigureOut">
               <a:rPr lang="en-US" smtClean="0"/>
-              <a:t>9/22/25</a:t>
+              <a:t>7/2/26</a:t>
             </a:fld>
             <a:endParaRPr lang="en-US"/>
           </a:p>
@@ -5025,7 +5523,7 @@
           <a:p>
             <a:fld id="{5BCAD085-E8A6-8845-BD4E-CB4CCA059FC4}" type="datetimeFigureOut">
               <a:rPr lang="en-US" smtClean="0"/>
-              <a:t>9/22/25</a:t>
+              <a:t>7/2/26</a:t>
             </a:fld>
             <a:endParaRPr lang="en-US"/>
           </a:p>
@@ -5120,7 +5618,7 @@
           <a:p>
             <a:fld id="{5BCAD085-E8A6-8845-BD4E-CB4CCA059FC4}" type="datetimeFigureOut">
               <a:rPr lang="en-US" smtClean="0"/>
-              <a:t>9/22/25</a:t>
+              <a:t>7/2/26</a:t>
             </a:fld>
             <a:endParaRPr lang="en-US"/>
           </a:p>
@@ -5395,7 +5893,7 @@
           <a:p>
             <a:fld id="{5BCAD085-E8A6-8845-BD4E-CB4CCA059FC4}" type="datetimeFigureOut">
               <a:rPr lang="en-US" smtClean="0"/>
-              <a:t>9/22/25</a:t>
+              <a:t>7/2/26</a:t>
             </a:fld>
             <a:endParaRPr lang="en-US"/>
           </a:p>
@@ -5647,7 +6145,7 @@
           <a:p>
             <a:fld id="{5BCAD085-E8A6-8845-BD4E-CB4CCA059FC4}" type="datetimeFigureOut">
               <a:rPr lang="en-US" smtClean="0"/>
-              <a:t>9/22/25</a:t>
+              <a:t>7/2/26</a:t>
             </a:fld>
             <a:endParaRPr lang="en-US"/>
           </a:p>
@@ -5858,7 +6356,7 @@
           <a:p>
             <a:fld id="{5BCAD085-E8A6-8845-BD4E-CB4CCA059FC4}" type="datetimeFigureOut">
               <a:rPr lang="en-US" smtClean="0"/>
-              <a:t>9/22/25</a:t>
+              <a:t>7/2/26</a:t>
             </a:fld>
             <a:endParaRPr lang="en-US"/>
           </a:p>
@@ -6310,147 +6808,6 @@
           </a:p>
         </p:txBody>
       </p:sp>
-      <p:sp>
-        <p:nvSpPr>
-          <p:cNvPr id="6" name="Rectangle 5"/>
-          <p:cNvSpPr/>
-          <p:nvPr/>
-        </p:nvSpPr>
-        <p:spPr>
-          <a:xfrm>
-            <a:off x="457200" y="2240280"/>
-            <a:ext cx="1097280" cy="1097280"/>
-          </a:xfrm>
-          <a:prstGeom prst="rect">
-            <a:avLst/>
-          </a:prstGeom>
-          <a:solidFill>
-            <a:srgbClr val="EBEEF5"/>
-          </a:solidFill>
-          <a:ln>
-            <a:solidFill>
-              <a:srgbClr val="C8CDD7"/>
-            </a:solidFill>
-          </a:ln>
-        </p:spPr>
-        <p:style>
-          <a:lnRef idx="1">
-            <a:schemeClr val="accent1"/>
-          </a:lnRef>
-          <a:fillRef idx="3">
-            <a:schemeClr val="accent1"/>
-          </a:fillRef>
-          <a:effectRef idx="2">
-            <a:schemeClr val="accent1"/>
-          </a:effectRef>
-          <a:fontRef idx="minor">
-            <a:schemeClr val="lt1"/>
-          </a:fontRef>
-        </p:style>
-        <p:txBody>
-          <a:bodyPr rtlCol="0" anchor="ctr"/>
-          <a:lstStyle/>
-          <a:p>
-            <a:endParaRPr sz="900" dirty="0"/>
-          </a:p>
-        </p:txBody>
-      </p:sp>
-      <p:pic>
-        <p:nvPicPr>
-          <p:cNvPr id="9" name="Picture 8" descr="kickoff.png"/>
-          <p:cNvPicPr>
-            <a:picLocks noChangeAspect="1"/>
-          </p:cNvPicPr>
-          <p:nvPr/>
-        </p:nvPicPr>
-        <p:blipFill>
-          <a:blip r:embed="rId2"/>
-          <a:stretch>
-            <a:fillRect/>
-          </a:stretch>
-        </p:blipFill>
-        <p:spPr>
-          <a:xfrm>
-            <a:off x="2487168" y="2240280"/>
-            <a:ext cx="1097280" cy="822960"/>
-          </a:xfrm>
-          <a:prstGeom prst="rect">
-            <a:avLst/>
-          </a:prstGeom>
-        </p:spPr>
-      </p:pic>
-      <p:pic>
-        <p:nvPicPr>
-          <p:cNvPr id="15" name="Picture 14" descr="78a90984-cf00-4980-a880-4b2627565d9f.png"/>
-          <p:cNvPicPr>
-            <a:picLocks noChangeAspect="1"/>
-          </p:cNvPicPr>
-          <p:nvPr/>
-        </p:nvPicPr>
-        <p:blipFill>
-          <a:blip r:embed="rId3"/>
-          <a:stretch>
-            <a:fillRect/>
-          </a:stretch>
-        </p:blipFill>
-        <p:spPr>
-          <a:xfrm>
-            <a:off x="6787896" y="2273856"/>
-            <a:ext cx="1097280" cy="1097280"/>
-          </a:xfrm>
-          <a:prstGeom prst="rect">
-            <a:avLst/>
-          </a:prstGeom>
-        </p:spPr>
-      </p:pic>
-      <p:pic>
-        <p:nvPicPr>
-          <p:cNvPr id="18" name="Picture 17" descr="launch.png"/>
-          <p:cNvPicPr>
-            <a:picLocks noChangeAspect="1"/>
-          </p:cNvPicPr>
-          <p:nvPr/>
-        </p:nvPicPr>
-        <p:blipFill>
-          <a:blip r:embed="rId4"/>
-          <a:stretch>
-            <a:fillRect/>
-          </a:stretch>
-        </p:blipFill>
-        <p:spPr>
-          <a:xfrm>
-            <a:off x="8577072" y="2240280"/>
-            <a:ext cx="1097280" cy="822960"/>
-          </a:xfrm>
-          <a:prstGeom prst="rect">
-            <a:avLst/>
-          </a:prstGeom>
-        </p:spPr>
-      </p:pic>
-      <p:pic>
-        <p:nvPicPr>
-          <p:cNvPr id="21" name="Picture 20" descr="retro.png"/>
-          <p:cNvPicPr>
-            <a:picLocks noChangeAspect="1"/>
-          </p:cNvPicPr>
-          <p:nvPr/>
-        </p:nvPicPr>
-        <p:blipFill>
-          <a:blip r:embed="rId5"/>
-          <a:stretch>
-            <a:fillRect/>
-          </a:stretch>
-        </p:blipFill>
-        <p:spPr>
-          <a:xfrm>
-            <a:off x="10607040" y="2240280"/>
-            <a:ext cx="1097280" cy="822960"/>
-          </a:xfrm>
-          <a:prstGeom prst="rect">
-            <a:avLst/>
-          </a:prstGeom>
-        </p:spPr>
-      </p:pic>
       <p:graphicFrame>
         <p:nvGraphicFramePr>
           <p:cNvPr id="23" name="Diagram 22">
@@ -6464,113 +6821,235 @@
           <p:nvPr>
             <p:extLst>
               <p:ext uri="{D42A27DB-BD31-4B8C-83A1-F6EECF244321}">
-                <p14:modId xmlns:p14="http://schemas.microsoft.com/office/powerpoint/2010/main" val="1523239720"/>
+                <p14:modId xmlns:p14="http://schemas.microsoft.com/office/powerpoint/2010/main" val="2014245289"/>
               </p:ext>
             </p:extLst>
           </p:nvPr>
         </p:nvGraphicFramePr>
         <p:xfrm>
-          <a:off x="457200" y="3291840"/>
+          <a:off x="432487" y="3288301"/>
           <a:ext cx="11361420" cy="2103120"/>
         </p:xfrm>
         <a:graphic>
           <a:graphicData uri="http://schemas.openxmlformats.org/drawingml/2006/diagram">
-            <dgm:relIds xmlns:dgm="http://schemas.openxmlformats.org/drawingml/2006/diagram" xmlns:r="http://schemas.openxmlformats.org/officeDocument/2006/relationships" r:dm="rId6" r:lo="rId7" r:qs="rId8" r:cs="rId9"/>
+            <dgm:relIds xmlns:dgm="http://schemas.openxmlformats.org/drawingml/2006/diagram" xmlns:r="http://schemas.openxmlformats.org/officeDocument/2006/relationships" r:dm="rId3" r:lo="rId4" r:qs="rId5" r:cs="rId6"/>
           </a:graphicData>
         </a:graphic>
       </p:graphicFrame>
       <p:pic>
         <p:nvPicPr>
-          <p:cNvPr id="1026" name="Picture 2">
+          <p:cNvPr id="7" name="Graphic 6" descr="Handshake with solid fill">
             <a:extLst>
               <a:ext uri="{FF2B5EF4-FFF2-40B4-BE49-F238E27FC236}">
-                <a16:creationId xmlns:a16="http://schemas.microsoft.com/office/drawing/2014/main" id="{868D6307-5EAA-67C2-F6C7-F9723BCB2B29}"/>
+                <a16:creationId xmlns:a16="http://schemas.microsoft.com/office/drawing/2014/main" id="{16A2914B-BD7F-DE46-D731-C189EBADADA4}"/>
               </a:ext>
             </a:extLst>
           </p:cNvPr>
           <p:cNvPicPr>
-            <a:picLocks noChangeAspect="1" noChangeArrowheads="1"/>
+            <a:picLocks noChangeAspect="1"/>
           </p:cNvPicPr>
           <p:nvPr/>
         </p:nvPicPr>
-        <p:blipFill rotWithShape="1">
-          <a:blip r:embed="rId11">
+        <p:blipFill>
+          <a:blip>
             <a:extLst>
-              <a:ext uri="{28A0092B-C50C-407E-A947-70E740481C1C}">
-                <a14:useLocalDpi xmlns:a14="http://schemas.microsoft.com/office/drawing/2010/main" val="0"/>
+              <a:ext uri="{96DAC541-7B7A-43D3-8B79-37D633B846F1}">
+                <asvg:svgBlip xmlns:asvg="http://schemas.microsoft.com/office/drawing/2016/SVG/main" r:embed="rId8"/>
               </a:ext>
             </a:extLst>
           </a:blip>
-          <a:srcRect l="39619" t="-4369"/>
           <a:stretch>
             <a:fillRect/>
           </a:stretch>
         </p:blipFill>
-        <p:spPr bwMode="auto">
+        <p:spPr>
           <a:xfrm>
-            <a:off x="4276344" y="2356657"/>
-            <a:ext cx="1899836" cy="669175"/>
+            <a:off x="2533856" y="3186808"/>
+            <a:ext cx="914400" cy="914400"/>
           </a:xfrm>
           <a:prstGeom prst="rect">
             <a:avLst/>
           </a:prstGeom>
-          <a:noFill/>
-          <a:extLst>
-            <a:ext uri="{909E8E84-426E-40DD-AFC4-6F175D3DCCD1}">
-              <a14:hiddenFill xmlns:a14="http://schemas.microsoft.com/office/drawing/2010/main">
-                <a:solidFill>
-                  <a:srgbClr val="FFFFFF"/>
-                </a:solidFill>
-              </a14:hiddenFill>
-            </a:ext>
-          </a:extLst>
         </p:spPr>
       </p:pic>
       <p:pic>
         <p:nvPicPr>
-          <p:cNvPr id="1028" name="Picture 4" descr="Vector clip art of approved stamp | Free SVG">
+          <p:cNvPr id="10" name="Graphic 9" descr="Tools with solid fill">
             <a:extLst>
               <a:ext uri="{FF2B5EF4-FFF2-40B4-BE49-F238E27FC236}">
-                <a16:creationId xmlns:a16="http://schemas.microsoft.com/office/drawing/2014/main" id="{1344F85B-500A-9EAF-F7F0-127F0EBB0614}"/>
+                <a16:creationId xmlns:a16="http://schemas.microsoft.com/office/drawing/2014/main" id="{48B803F4-605B-FFD6-1407-63656FA5AB49}"/>
               </a:ext>
             </a:extLst>
           </p:cNvPr>
           <p:cNvPicPr>
-            <a:picLocks noChangeAspect="1" noChangeArrowheads="1"/>
+            <a:picLocks noChangeAspect="1"/>
           </p:cNvPicPr>
           <p:nvPr/>
         </p:nvPicPr>
         <p:blipFill>
-          <a:blip r:embed="rId12">
+          <a:blip>
             <a:extLst>
-              <a:ext uri="{28A0092B-C50C-407E-A947-70E740481C1C}">
-                <a14:useLocalDpi xmlns:a14="http://schemas.microsoft.com/office/drawing/2010/main" val="0"/>
+              <a:ext uri="{96DAC541-7B7A-43D3-8B79-37D633B846F1}">
+                <asvg:svgBlip xmlns:asvg="http://schemas.microsoft.com/office/drawing/2016/SVG/main" r:embed="rId9"/>
               </a:ext>
             </a:extLst>
           </a:blip>
-          <a:srcRect/>
           <a:stretch>
             <a:fillRect/>
           </a:stretch>
         </p:blipFill>
-        <p:spPr bwMode="auto">
+        <p:spPr>
           <a:xfrm>
-            <a:off x="513635" y="2273856"/>
-            <a:ext cx="984409" cy="984409"/>
+            <a:off x="4182176" y="4578514"/>
+            <a:ext cx="914400" cy="914400"/>
           </a:xfrm>
           <a:prstGeom prst="rect">
             <a:avLst/>
           </a:prstGeom>
-          <a:noFill/>
-          <a:extLst>
-            <a:ext uri="{909E8E84-426E-40DD-AFC4-6F175D3DCCD1}">
-              <a14:hiddenFill xmlns:a14="http://schemas.microsoft.com/office/drawing/2010/main">
-                <a:solidFill>
-                  <a:srgbClr val="FFFFFF"/>
-                </a:solidFill>
-              </a14:hiddenFill>
-            </a:ext>
-          </a:extLst>
+        </p:spPr>
+      </p:pic>
+      <p:pic>
+        <p:nvPicPr>
+          <p:cNvPr id="12" name="Graphic 11" descr="Signature with solid fill">
+            <a:extLst>
+              <a:ext uri="{FF2B5EF4-FFF2-40B4-BE49-F238E27FC236}">
+                <a16:creationId xmlns:a16="http://schemas.microsoft.com/office/drawing/2014/main" id="{F8CAC5FB-E639-944D-DA33-4A17871D3496}"/>
+              </a:ext>
+            </a:extLst>
+          </p:cNvPr>
+          <p:cNvPicPr>
+            <a:picLocks noChangeAspect="1"/>
+          </p:cNvPicPr>
+          <p:nvPr/>
+        </p:nvPicPr>
+        <p:blipFill>
+          <a:blip>
+            <a:extLst>
+              <a:ext uri="{96DAC541-7B7A-43D3-8B79-37D633B846F1}">
+                <asvg:svgBlip xmlns:asvg="http://schemas.microsoft.com/office/drawing/2016/SVG/main" r:embed="rId10"/>
+              </a:ext>
+            </a:extLst>
+          </a:blip>
+          <a:stretch>
+            <a:fillRect/>
+          </a:stretch>
+        </p:blipFill>
+        <p:spPr>
+          <a:xfrm>
+            <a:off x="731520" y="4582053"/>
+            <a:ext cx="914400" cy="914400"/>
+          </a:xfrm>
+          <a:prstGeom prst="rect">
+            <a:avLst/>
+          </a:prstGeom>
+        </p:spPr>
+      </p:pic>
+      <p:pic>
+        <p:nvPicPr>
+          <p:cNvPr id="14" name="Graphic 13" descr="Flask with solid fill">
+            <a:extLst>
+              <a:ext uri="{FF2B5EF4-FFF2-40B4-BE49-F238E27FC236}">
+                <a16:creationId xmlns:a16="http://schemas.microsoft.com/office/drawing/2014/main" id="{83CBD523-1EB4-8791-5381-AD7B40D4545C}"/>
+              </a:ext>
+            </a:extLst>
+          </p:cNvPr>
+          <p:cNvPicPr>
+            <a:picLocks noChangeAspect="1"/>
+          </p:cNvPicPr>
+          <p:nvPr/>
+        </p:nvPicPr>
+        <p:blipFill>
+          <a:blip>
+            <a:extLst>
+              <a:ext uri="{96DAC541-7B7A-43D3-8B79-37D633B846F1}">
+                <asvg:svgBlip xmlns:asvg="http://schemas.microsoft.com/office/drawing/2016/SVG/main" r:embed="rId11"/>
+              </a:ext>
+            </a:extLst>
+          </a:blip>
+          <a:stretch>
+            <a:fillRect/>
+          </a:stretch>
+        </p:blipFill>
+        <p:spPr>
+          <a:xfrm>
+            <a:off x="5947719" y="3183269"/>
+            <a:ext cx="914400" cy="914400"/>
+          </a:xfrm>
+          <a:prstGeom prst="rect">
+            <a:avLst/>
+          </a:prstGeom>
+        </p:spPr>
+      </p:pic>
+      <p:pic>
+        <p:nvPicPr>
+          <p:cNvPr id="17" name="Graphic 16" descr="Rocket with solid fill">
+            <a:extLst>
+              <a:ext uri="{FF2B5EF4-FFF2-40B4-BE49-F238E27FC236}">
+                <a16:creationId xmlns:a16="http://schemas.microsoft.com/office/drawing/2014/main" id="{2A3B0CDC-F19A-A210-3C12-953918A0DD77}"/>
+              </a:ext>
+            </a:extLst>
+          </p:cNvPr>
+          <p:cNvPicPr>
+            <a:picLocks noChangeAspect="1"/>
+          </p:cNvPicPr>
+          <p:nvPr/>
+        </p:nvPicPr>
+        <p:blipFill>
+          <a:blip>
+            <a:extLst>
+              <a:ext uri="{96DAC541-7B7A-43D3-8B79-37D633B846F1}">
+                <asvg:svgBlip xmlns:asvg="http://schemas.microsoft.com/office/drawing/2016/SVG/main" r:embed="rId12"/>
+              </a:ext>
+            </a:extLst>
+          </a:blip>
+          <a:stretch>
+            <a:fillRect/>
+          </a:stretch>
+        </p:blipFill>
+        <p:spPr>
+          <a:xfrm>
+            <a:off x="7719331" y="4578514"/>
+            <a:ext cx="914400" cy="914400"/>
+          </a:xfrm>
+          <a:prstGeom prst="rect">
+            <a:avLst/>
+          </a:prstGeom>
+        </p:spPr>
+      </p:pic>
+      <p:pic>
+        <p:nvPicPr>
+          <p:cNvPr id="20" name="Graphic 19" descr="Magnifying glass with solid fill">
+            <a:extLst>
+              <a:ext uri="{FF2B5EF4-FFF2-40B4-BE49-F238E27FC236}">
+                <a16:creationId xmlns:a16="http://schemas.microsoft.com/office/drawing/2014/main" id="{D86F324F-3C68-1DD6-027C-80C7F974B774}"/>
+              </a:ext>
+            </a:extLst>
+          </p:cNvPr>
+          <p:cNvPicPr>
+            <a:picLocks noChangeAspect="1"/>
+          </p:cNvPicPr>
+          <p:nvPr/>
+        </p:nvPicPr>
+        <p:blipFill>
+          <a:blip>
+            <a:extLst>
+              <a:ext uri="{96DAC541-7B7A-43D3-8B79-37D633B846F1}">
+                <asvg:svgBlip xmlns:asvg="http://schemas.microsoft.com/office/drawing/2016/SVG/main" r:embed="rId13"/>
+              </a:ext>
+            </a:extLst>
+          </a:blip>
+          <a:stretch>
+            <a:fillRect/>
+          </a:stretch>
+        </p:blipFill>
+        <p:spPr>
+          <a:xfrm>
+            <a:off x="9361582" y="3183269"/>
+            <a:ext cx="914400" cy="914400"/>
+          </a:xfrm>
+          <a:prstGeom prst="rect">
+            <a:avLst/>
+          </a:prstGeom>
         </p:spPr>
       </p:pic>
     </p:spTree>
@@ -6899,4 +7378,319 @@
   </a:objectDefaults>
   <a:extraClrSchemeLst/>
 </a:theme>
+</file>
+
+<file path=ppt/theme/theme2.xml><?xml version="1.0" encoding="utf-8"?>
+<a:theme xmlns:a="http://schemas.openxmlformats.org/drawingml/2006/main" name="Office Theme">
+  <a:themeElements>
+    <a:clrScheme name="Office">
+      <a:dk1>
+        <a:sysClr val="windowText" lastClr="000000"/>
+      </a:dk1>
+      <a:lt1>
+        <a:sysClr val="window" lastClr="FFFFFF"/>
+      </a:lt1>
+      <a:dk2>
+        <a:srgbClr val="0E2841"/>
+      </a:dk2>
+      <a:lt2>
+        <a:srgbClr val="E8E8E8"/>
+      </a:lt2>
+      <a:accent1>
+        <a:srgbClr val="156082"/>
+      </a:accent1>
+      <a:accent2>
+        <a:srgbClr val="E97132"/>
+      </a:accent2>
+      <a:accent3>
+        <a:srgbClr val="196B24"/>
+      </a:accent3>
+      <a:accent4>
+        <a:srgbClr val="0F9ED5"/>
+      </a:accent4>
+      <a:accent5>
+        <a:srgbClr val="A02B93"/>
+      </a:accent5>
+      <a:accent6>
+        <a:srgbClr val="4EA72E"/>
+      </a:accent6>
+      <a:hlink>
+        <a:srgbClr val="467886"/>
+      </a:hlink>
+      <a:folHlink>
+        <a:srgbClr val="96607D"/>
+      </a:folHlink>
+    </a:clrScheme>
+    <a:fontScheme name="Office">
+      <a:majorFont>
+        <a:latin typeface="Aptos Display" panose="02110004020202020204"/>
+        <a:ea typeface=""/>
+        <a:cs typeface=""/>
+        <a:font script="Jpan" typeface="游ゴシック Light"/>
+        <a:font script="Hang" typeface="맑은 고딕"/>
+        <a:font script="Hans" typeface="等线 Light"/>
+        <a:font script="Hant" typeface="新細明體"/>
+        <a:font script="Arab" typeface="Times New Roman"/>
+        <a:font script="Hebr" typeface="Times New Roman"/>
+        <a:font script="Thai" typeface="Angsana New"/>
+        <a:font script="Ethi" typeface="Nyala"/>
+        <a:font script="Beng" typeface="Vrinda"/>
+        <a:font script="Gujr" typeface="Shruti"/>
+        <a:font script="Khmr" typeface="MoolBoran"/>
+        <a:font script="Knda" typeface="Tunga"/>
+        <a:font script="Guru" typeface="Raavi"/>
+        <a:font script="Cans" typeface="Euphemia"/>
+        <a:font script="Cher" typeface="Plantagenet Cherokee"/>
+        <a:font script="Yiii" typeface="Microsoft Yi Baiti"/>
+        <a:font script="Tibt" typeface="Microsoft Himalaya"/>
+        <a:font script="Thaa" typeface="MV Boli"/>
+        <a:font script="Deva" typeface="Mangal"/>
+        <a:font script="Telu" typeface="Gautami"/>
+        <a:font script="Taml" typeface="Latha"/>
+        <a:font script="Syrc" typeface="Estrangelo Edessa"/>
+        <a:font script="Orya" typeface="Kalinga"/>
+        <a:font script="Mlym" typeface="Kartika"/>
+        <a:font script="Laoo" typeface="DokChampa"/>
+        <a:font script="Sinh" typeface="Iskoola Pota"/>
+        <a:font script="Mong" typeface="Mongolian Baiti"/>
+        <a:font script="Viet" typeface="Times New Roman"/>
+        <a:font script="Uigh" typeface="Microsoft Uighur"/>
+        <a:font script="Geor" typeface="Sylfaen"/>
+        <a:font script="Armn" typeface="Arial"/>
+        <a:font script="Bugi" typeface="Leelawadee UI"/>
+        <a:font script="Bopo" typeface="Microsoft JhengHei"/>
+        <a:font script="Java" typeface="Javanese Text"/>
+        <a:font script="Lisu" typeface="Segoe UI"/>
+        <a:font script="Mymr" typeface="Myanmar Text"/>
+        <a:font script="Nkoo" typeface="Ebrima"/>
+        <a:font script="Olck" typeface="Nirmala UI"/>
+        <a:font script="Osma" typeface="Ebrima"/>
+        <a:font script="Phag" typeface="Phagspa"/>
+        <a:font script="Syrn" typeface="Estrangelo Edessa"/>
+        <a:font script="Syrj" typeface="Estrangelo Edessa"/>
+        <a:font script="Syre" typeface="Estrangelo Edessa"/>
+        <a:font script="Sora" typeface="Nirmala UI"/>
+        <a:font script="Tale" typeface="Microsoft Tai Le"/>
+        <a:font script="Talu" typeface="Microsoft New Tai Lue"/>
+        <a:font script="Tfng" typeface="Ebrima"/>
+      </a:majorFont>
+      <a:minorFont>
+        <a:latin typeface="Aptos" panose="02110004020202020204"/>
+        <a:ea typeface=""/>
+        <a:cs typeface=""/>
+        <a:font script="Jpan" typeface="游ゴシック"/>
+        <a:font script="Hang" typeface="맑은 고딕"/>
+        <a:font script="Hans" typeface="等线"/>
+        <a:font script="Hant" typeface="新細明體"/>
+        <a:font script="Arab" typeface="Arial"/>
+        <a:font script="Hebr" typeface="Arial"/>
+        <a:font script="Thai" typeface="Cordia New"/>
+        <a:font script="Ethi" typeface="Nyala"/>
+        <a:font script="Beng" typeface="Vrinda"/>
+        <a:font script="Gujr" typeface="Shruti"/>
+        <a:font script="Khmr" typeface="DaunPenh"/>
+        <a:font script="Knda" typeface="Tunga"/>
+        <a:font script="Guru" typeface="Raavi"/>
+        <a:font script="Cans" typeface="Euphemia"/>
+        <a:font script="Cher" typeface="Plantagenet Cherokee"/>
+        <a:font script="Yiii" typeface="Microsoft Yi Baiti"/>
+        <a:font script="Tibt" typeface="Microsoft Himalaya"/>
+        <a:font script="Thaa" typeface="MV Boli"/>
+        <a:font script="Deva" typeface="Mangal"/>
+        <a:font script="Telu" typeface="Gautami"/>
+        <a:font script="Taml" typeface="Latha"/>
+        <a:font script="Syrc" typeface="Estrangelo Edessa"/>
+        <a:font script="Orya" typeface="Kalinga"/>
+        <a:font script="Mlym" typeface="Kartika"/>
+        <a:font script="Laoo" typeface="DokChampa"/>
+        <a:font script="Sinh" typeface="Iskoola Pota"/>
+        <a:font script="Mong" typeface="Mongolian Baiti"/>
+        <a:font script="Viet" typeface="Arial"/>
+        <a:font script="Uigh" typeface="Microsoft Uighur"/>
+        <a:font script="Geor" typeface="Sylfaen"/>
+        <a:font script="Armn" typeface="Arial"/>
+        <a:font script="Bugi" typeface="Leelawadee UI"/>
+        <a:font script="Bopo" typeface="Microsoft JhengHei"/>
+        <a:font script="Java" typeface="Javanese Text"/>
+        <a:font script="Lisu" typeface="Segoe UI"/>
+        <a:font script="Mymr" typeface="Myanmar Text"/>
+        <a:font script="Nkoo" typeface="Ebrima"/>
+        <a:font script="Olck" typeface="Nirmala UI"/>
+        <a:font script="Osma" typeface="Ebrima"/>
+        <a:font script="Phag" typeface="Phagspa"/>
+        <a:font script="Syrn" typeface="Estrangelo Edessa"/>
+        <a:font script="Syrj" typeface="Estrangelo Edessa"/>
+        <a:font script="Syre" typeface="Estrangelo Edessa"/>
+        <a:font script="Sora" typeface="Nirmala UI"/>
+        <a:font script="Tale" typeface="Microsoft Tai Le"/>
+        <a:font script="Talu" typeface="Microsoft New Tai Lue"/>
+        <a:font script="Tfng" typeface="Ebrima"/>
+      </a:minorFont>
+    </a:fontScheme>
+    <a:fmtScheme name="Office">
+      <a:fillStyleLst>
+        <a:solidFill>
+          <a:schemeClr val="phClr"/>
+        </a:solidFill>
+        <a:gradFill rotWithShape="1">
+          <a:gsLst>
+            <a:gs pos="0">
+              <a:schemeClr val="phClr">
+                <a:lumMod val="110000"/>
+                <a:satMod val="105000"/>
+                <a:tint val="67000"/>
+              </a:schemeClr>
+            </a:gs>
+            <a:gs pos="50000">
+              <a:schemeClr val="phClr">
+                <a:lumMod val="105000"/>
+                <a:satMod val="103000"/>
+                <a:tint val="73000"/>
+              </a:schemeClr>
+            </a:gs>
+            <a:gs pos="100000">
+              <a:schemeClr val="phClr">
+                <a:lumMod val="105000"/>
+                <a:satMod val="109000"/>
+                <a:tint val="81000"/>
+              </a:schemeClr>
+            </a:gs>
+          </a:gsLst>
+          <a:lin ang="5400000" scaled="0"/>
+        </a:gradFill>
+        <a:gradFill rotWithShape="1">
+          <a:gsLst>
+            <a:gs pos="0">
+              <a:schemeClr val="phClr">
+                <a:satMod val="103000"/>
+                <a:lumMod val="102000"/>
+                <a:tint val="94000"/>
+              </a:schemeClr>
+            </a:gs>
+            <a:gs pos="50000">
+              <a:schemeClr val="phClr">
+                <a:satMod val="110000"/>
+                <a:lumMod val="100000"/>
+                <a:shade val="100000"/>
+              </a:schemeClr>
+            </a:gs>
+            <a:gs pos="100000">
+              <a:schemeClr val="phClr">
+                <a:lumMod val="99000"/>
+                <a:satMod val="120000"/>
+                <a:shade val="78000"/>
+              </a:schemeClr>
+            </a:gs>
+          </a:gsLst>
+          <a:lin ang="5400000" scaled="0"/>
+        </a:gradFill>
+      </a:fillStyleLst>
+      <a:lnStyleLst>
+        <a:ln w="12700" cap="flat" cmpd="sng" algn="ctr">
+          <a:solidFill>
+            <a:schemeClr val="phClr"/>
+          </a:solidFill>
+          <a:prstDash val="solid"/>
+          <a:miter lim="800000"/>
+        </a:ln>
+        <a:ln w="19050" cap="flat" cmpd="sng" algn="ctr">
+          <a:solidFill>
+            <a:schemeClr val="phClr"/>
+          </a:solidFill>
+          <a:prstDash val="solid"/>
+          <a:miter lim="800000"/>
+        </a:ln>
+        <a:ln w="25400" cap="flat" cmpd="sng" algn="ctr">
+          <a:solidFill>
+            <a:schemeClr val="phClr"/>
+          </a:solidFill>
+          <a:prstDash val="solid"/>
+          <a:miter lim="800000"/>
+        </a:ln>
+      </a:lnStyleLst>
+      <a:effectStyleLst>
+        <a:effectStyle>
+          <a:effectLst/>
+        </a:effectStyle>
+        <a:effectStyle>
+          <a:effectLst/>
+        </a:effectStyle>
+        <a:effectStyle>
+          <a:effectLst>
+            <a:outerShdw blurRad="57150" dist="19050" dir="5400000" algn="ctr" rotWithShape="0">
+              <a:srgbClr val="000000">
+                <a:alpha val="63000"/>
+              </a:srgbClr>
+            </a:outerShdw>
+          </a:effectLst>
+        </a:effectStyle>
+      </a:effectStyleLst>
+      <a:bgFillStyleLst>
+        <a:solidFill>
+          <a:schemeClr val="phClr"/>
+        </a:solidFill>
+        <a:solidFill>
+          <a:schemeClr val="phClr">
+            <a:tint val="95000"/>
+            <a:satMod val="170000"/>
+          </a:schemeClr>
+        </a:solidFill>
+        <a:gradFill rotWithShape="1">
+          <a:gsLst>
+            <a:gs pos="0">
+              <a:schemeClr val="phClr">
+                <a:tint val="93000"/>
+                <a:satMod val="150000"/>
+                <a:shade val="98000"/>
+                <a:lumMod val="102000"/>
+              </a:schemeClr>
+            </a:gs>
+            <a:gs pos="50000">
+              <a:schemeClr val="phClr">
+                <a:tint val="98000"/>
+                <a:satMod val="130000"/>
+                <a:shade val="90000"/>
+                <a:lumMod val="103000"/>
+              </a:schemeClr>
+            </a:gs>
+            <a:gs pos="100000">
+              <a:schemeClr val="phClr">
+                <a:shade val="63000"/>
+                <a:satMod val="120000"/>
+              </a:schemeClr>
+            </a:gs>
+          </a:gsLst>
+          <a:lin ang="5400000" scaled="0"/>
+        </a:gradFill>
+      </a:bgFillStyleLst>
+    </a:fmtScheme>
+  </a:themeElements>
+  <a:objectDefaults>
+    <a:lnDef>
+      <a:spPr/>
+      <a:bodyPr/>
+      <a:lstStyle/>
+      <a:style>
+        <a:lnRef idx="2">
+          <a:schemeClr val="accent1"/>
+        </a:lnRef>
+        <a:fillRef idx="0">
+          <a:schemeClr val="accent1"/>
+        </a:fillRef>
+        <a:effectRef idx="1">
+          <a:schemeClr val="accent1"/>
+        </a:effectRef>
+        <a:fontRef idx="minor">
+          <a:schemeClr val="tx1"/>
+        </a:fontRef>
+      </a:style>
+    </a:lnDef>
+  </a:objectDefaults>
+  <a:extraClrSchemeLst/>
+  <a:extLst>
+    <a:ext uri="{05A4C25C-085E-4340-85A3-A5531E510DB2}">
+      <thm15:themeFamily xmlns:thm15="http://schemas.microsoft.com/office/thememl/2012/main" name="Office Theme" id="{2E142A2C-CD16-42D6-873A-C26D2A0506FA}" vid="{1BDDFF52-6CD6-40A5-AB3C-68EB2F1E4D0A}"/>
+    </a:ext>
+  </a:extLst>
+</a:theme>
 </file>